--- a/lecture_slides/Week6_Lecture11_DFT_Fast_Convolution_100126_forClass.pptx
+++ b/lecture_slides/Week6_Lecture11_DFT_Fast_Convolution_100126_forClass.pptx
@@ -18,12 +18,14 @@
     <p:sldId id="273" r:id="rId12"/>
     <p:sldId id="265" r:id="rId13"/>
     <p:sldId id="266" r:id="rId14"/>
-    <p:sldId id="267" r:id="rId15"/>
-    <p:sldId id="268" r:id="rId16"/>
-    <p:sldId id="269" r:id="rId17"/>
-    <p:sldId id="270" r:id="rId18"/>
-    <p:sldId id="271" r:id="rId19"/>
-    <p:sldId id="272" r:id="rId20"/>
+    <p:sldId id="299" r:id="rId15"/>
+    <p:sldId id="267" r:id="rId16"/>
+    <p:sldId id="268" r:id="rId17"/>
+    <p:sldId id="300" r:id="rId18"/>
+    <p:sldId id="269" r:id="rId19"/>
+    <p:sldId id="270" r:id="rId20"/>
+    <p:sldId id="271" r:id="rId21"/>
+    <p:sldId id="272" r:id="rId22"/>
   </p:sldIdLst>
   <p:sldSz cx="12192000" cy="6858000"/>
   <p:notesSz cx="6858000" cy="9144000"/>
@@ -320,7 +322,7 @@
           <a:p>
             <a:fld id="{5BCAD085-E8A6-8845-BD4E-CB4CCA059FC4}" type="datetimeFigureOut">
               <a:rPr lang="en-US" smtClean="0"/>
-              <a:t>10/1/2026</a:t>
+              <a:t>10/7/2026</a:t>
             </a:fld>
             <a:endParaRPr lang="en-US"/>
           </a:p>
@@ -488,7 +490,7 @@
           <a:p>
             <a:fld id="{5BCAD085-E8A6-8845-BD4E-CB4CCA059FC4}" type="datetimeFigureOut">
               <a:rPr lang="en-US" smtClean="0"/>
-              <a:t>10/1/2026</a:t>
+              <a:t>10/7/2026</a:t>
             </a:fld>
             <a:endParaRPr lang="en-US"/>
           </a:p>
@@ -666,7 +668,7 @@
           <a:p>
             <a:fld id="{5BCAD085-E8A6-8845-BD4E-CB4CCA059FC4}" type="datetimeFigureOut">
               <a:rPr lang="en-US" smtClean="0"/>
-              <a:t>10/1/2026</a:t>
+              <a:t>10/7/2026</a:t>
             </a:fld>
             <a:endParaRPr lang="en-US"/>
           </a:p>
@@ -834,7 +836,7 @@
           <a:p>
             <a:fld id="{5BCAD085-E8A6-8845-BD4E-CB4CCA059FC4}" type="datetimeFigureOut">
               <a:rPr lang="en-US" smtClean="0"/>
-              <a:t>10/1/2026</a:t>
+              <a:t>10/7/2026</a:t>
             </a:fld>
             <a:endParaRPr lang="en-US"/>
           </a:p>
@@ -1079,7 +1081,7 @@
           <a:p>
             <a:fld id="{5BCAD085-E8A6-8845-BD4E-CB4CCA059FC4}" type="datetimeFigureOut">
               <a:rPr lang="en-US" smtClean="0"/>
-              <a:t>10/1/2026</a:t>
+              <a:t>10/7/2026</a:t>
             </a:fld>
             <a:endParaRPr lang="en-US"/>
           </a:p>
@@ -1364,7 +1366,7 @@
           <a:p>
             <a:fld id="{5BCAD085-E8A6-8845-BD4E-CB4CCA059FC4}" type="datetimeFigureOut">
               <a:rPr lang="en-US" smtClean="0"/>
-              <a:t>10/1/2026</a:t>
+              <a:t>10/7/2026</a:t>
             </a:fld>
             <a:endParaRPr lang="en-US"/>
           </a:p>
@@ -1783,7 +1785,7 @@
           <a:p>
             <a:fld id="{5BCAD085-E8A6-8845-BD4E-CB4CCA059FC4}" type="datetimeFigureOut">
               <a:rPr lang="en-US" smtClean="0"/>
-              <a:t>10/1/2026</a:t>
+              <a:t>10/7/2026</a:t>
             </a:fld>
             <a:endParaRPr lang="en-US"/>
           </a:p>
@@ -1900,7 +1902,7 @@
           <a:p>
             <a:fld id="{5BCAD085-E8A6-8845-BD4E-CB4CCA059FC4}" type="datetimeFigureOut">
               <a:rPr lang="en-US" smtClean="0"/>
-              <a:t>10/1/2026</a:t>
+              <a:t>10/7/2026</a:t>
             </a:fld>
             <a:endParaRPr lang="en-US"/>
           </a:p>
@@ -1995,7 +1997,7 @@
           <a:p>
             <a:fld id="{5BCAD085-E8A6-8845-BD4E-CB4CCA059FC4}" type="datetimeFigureOut">
               <a:rPr lang="en-US" smtClean="0"/>
-              <a:t>10/1/2026</a:t>
+              <a:t>10/7/2026</a:t>
             </a:fld>
             <a:endParaRPr lang="en-US"/>
           </a:p>
@@ -2270,7 +2272,7 @@
           <a:p>
             <a:fld id="{5BCAD085-E8A6-8845-BD4E-CB4CCA059FC4}" type="datetimeFigureOut">
               <a:rPr lang="en-US" smtClean="0"/>
-              <a:t>10/1/2026</a:t>
+              <a:t>10/7/2026</a:t>
             </a:fld>
             <a:endParaRPr lang="en-US"/>
           </a:p>
@@ -2522,7 +2524,7 @@
           <a:p>
             <a:fld id="{5BCAD085-E8A6-8845-BD4E-CB4CCA059FC4}" type="datetimeFigureOut">
               <a:rPr lang="en-US" smtClean="0"/>
-              <a:t>10/1/2026</a:t>
+              <a:t>10/7/2026</a:t>
             </a:fld>
             <a:endParaRPr lang="en-US"/>
           </a:p>
@@ -2733,7 +2735,7 @@
           <a:p>
             <a:fld id="{5BCAD085-E8A6-8845-BD4E-CB4CCA059FC4}" type="datetimeFigureOut">
               <a:rPr lang="en-US" smtClean="0"/>
-              <a:t>10/1/2026</a:t>
+              <a:t>10/7/2026</a:t>
             </a:fld>
             <a:endParaRPr lang="en-US"/>
           </a:p>
@@ -4876,14 +4878,6 @@
 <file path=ppt/slides/slide14.xml><?xml version="1.0" encoding="utf-8"?>
 <p:sld xmlns:a="http://schemas.openxmlformats.org/drawingml/2006/main" xmlns:r="http://schemas.openxmlformats.org/officeDocument/2006/relationships" xmlns:p="http://schemas.openxmlformats.org/presentationml/2006/main">
   <p:cSld>
-    <p:bg>
-      <p:bgPr>
-        <a:solidFill>
-          <a:srgbClr val="FFFFFF"/>
-        </a:solidFill>
-        <a:effectLst/>
-      </p:bgPr>
-    </p:bg>
     <p:spTree>
       <p:nvGrpSpPr>
         <p:cNvPr id="1" name=""/>
@@ -4900,364 +4894,890 @@
       </p:grpSpPr>
       <p:sp>
         <p:nvSpPr>
-          <p:cNvPr id="2" name="Rectangle 1"/>
-          <p:cNvSpPr/>
-          <p:nvPr/>
-        </p:nvSpPr>
-        <p:spPr>
-          <a:xfrm>
-            <a:off x="0" y="0"/>
-            <a:ext cx="12191695" cy="164592"/>
-          </a:xfrm>
-          <a:prstGeom prst="rect">
-            <a:avLst/>
-          </a:prstGeom>
-          <a:solidFill>
-            <a:srgbClr val="24888E"/>
-          </a:solidFill>
-          <a:ln>
-            <a:noFill/>
-          </a:ln>
-        </p:spPr>
-        <p:style>
-          <a:lnRef idx="1">
-            <a:schemeClr val="accent1"/>
-          </a:lnRef>
-          <a:fillRef idx="3">
-            <a:schemeClr val="accent1"/>
-          </a:fillRef>
-          <a:effectRef idx="2">
-            <a:schemeClr val="accent1"/>
-          </a:effectRef>
-          <a:fontRef idx="minor">
-            <a:schemeClr val="lt1"/>
-          </a:fontRef>
-        </p:style>
-        <p:txBody>
-          <a:bodyPr rtlCol="0" anchor="ctr"/>
-          <a:lstStyle/>
-          <a:p>
-            <a:pPr algn="ctr"/>
-            <a:endParaRPr/>
-          </a:p>
-        </p:txBody>
-      </p:sp>
-      <p:sp>
-        <p:nvSpPr>
-          <p:cNvPr id="3" name="TextBox 2"/>
-          <p:cNvSpPr txBox="1"/>
-          <p:nvPr/>
-        </p:nvSpPr>
-        <p:spPr>
-          <a:xfrm>
-            <a:off x="502920" y="320040"/>
-            <a:ext cx="10972800" cy="502920"/>
-          </a:xfrm>
-          <a:prstGeom prst="rect">
-            <a:avLst/>
-          </a:prstGeom>
-          <a:noFill/>
-        </p:spPr>
-        <p:txBody>
-          <a:bodyPr wrap="square">
-            <a:spAutoFit/>
-          </a:bodyPr>
-          <a:lstStyle/>
-          <a:p>
-            <a:pPr algn="l"/>
-            <a:r>
-              <a:rPr sz="2900" b="1">
-                <a:solidFill>
-                  <a:srgbClr val="16253E"/>
-                </a:solidFill>
-                <a:latin typeface="Aptos"/>
-              </a:rPr>
-              <a:t>Overlap-Add gives the same FIR output</a:t>
-            </a:r>
-          </a:p>
-        </p:txBody>
-      </p:sp>
-      <p:sp>
-        <p:nvSpPr>
-          <p:cNvPr id="4" name="TextBox 3"/>
-          <p:cNvSpPr txBox="1"/>
-          <p:nvPr/>
-        </p:nvSpPr>
-        <p:spPr>
-          <a:xfrm>
-            <a:off x="530352" y="877824"/>
-            <a:ext cx="7315200" cy="256032"/>
-          </a:xfrm>
-          <a:prstGeom prst="rect">
-            <a:avLst/>
-          </a:prstGeom>
-          <a:noFill/>
-        </p:spPr>
-        <p:txBody>
-          <a:bodyPr wrap="square">
-            <a:spAutoFit/>
-          </a:bodyPr>
-          <a:lstStyle/>
-          <a:p>
-            <a:pPr algn="l"/>
-            <a:r>
-              <a:rPr sz="1100" b="1">
-                <a:solidFill>
-                  <a:srgbClr val="24888E"/>
-                </a:solidFill>
-                <a:latin typeface="Aptos"/>
-              </a:rPr>
-              <a:t>OVERLAP-ADD</a:t>
-            </a:r>
-          </a:p>
-        </p:txBody>
-      </p:sp>
-      <p:sp>
-        <p:nvSpPr>
-          <p:cNvPr id="5" name="TextBox 4"/>
-          <p:cNvSpPr txBox="1"/>
-          <p:nvPr/>
-        </p:nvSpPr>
-        <p:spPr>
-          <a:xfrm>
-            <a:off x="10241280" y="877824"/>
-            <a:ext cx="1463040" cy="256032"/>
-          </a:xfrm>
-          <a:prstGeom prst="rect">
-            <a:avLst/>
-          </a:prstGeom>
-          <a:noFill/>
-        </p:spPr>
-        <p:txBody>
-          <a:bodyPr wrap="square">
-            <a:spAutoFit/>
-          </a:bodyPr>
-          <a:lstStyle/>
-          <a:p>
-            <a:pPr algn="r"/>
-            <a:r>
-              <a:rPr sz="1100" b="0">
-                <a:solidFill>
-                  <a:srgbClr val="5A6676"/>
-                </a:solidFill>
-                <a:latin typeface="Aptos"/>
-              </a:rPr>
-              <a:t>0:54–0:58</a:t>
-            </a:r>
-          </a:p>
-        </p:txBody>
-      </p:sp>
-      <p:sp>
-        <p:nvSpPr>
-          <p:cNvPr id="6" name="TextBox 5"/>
-          <p:cNvSpPr txBox="1"/>
-          <p:nvPr/>
-        </p:nvSpPr>
-        <p:spPr>
-          <a:xfrm>
-            <a:off x="530352" y="6519672"/>
-            <a:ext cx="3931920" cy="182880"/>
-          </a:xfrm>
-          <a:prstGeom prst="rect">
-            <a:avLst/>
-          </a:prstGeom>
-          <a:noFill/>
-        </p:spPr>
-        <p:txBody>
-          <a:bodyPr wrap="square">
-            <a:spAutoFit/>
-          </a:bodyPr>
-          <a:lstStyle/>
-          <a:p>
-            <a:pPr algn="l"/>
-            <a:r>
-              <a:rPr sz="900" b="1">
-                <a:solidFill>
-                  <a:srgbClr val="5A6676"/>
-                </a:solidFill>
-                <a:latin typeface="Aptos"/>
-              </a:rPr>
-              <a:t>WEEK 10 • TIME-FREQUENCY ANALYSIS</a:t>
-            </a:r>
-          </a:p>
-        </p:txBody>
-      </p:sp>
-      <p:pic>
-        <p:nvPicPr>
-          <p:cNvPr id="7" name="Picture 6" descr="ola_equivalence.png"/>
-          <p:cNvPicPr>
-            <a:picLocks noChangeAspect="1"/>
-          </p:cNvPicPr>
-          <p:nvPr/>
-        </p:nvPicPr>
-        <p:blipFill>
-          <a:blip r:embed="rId2"/>
-          <a:stretch>
-            <a:fillRect/>
-          </a:stretch>
-        </p:blipFill>
-        <p:spPr>
-          <a:xfrm>
-            <a:off x="594360" y="1234440"/>
-            <a:ext cx="6858000" cy="3291840"/>
-          </a:xfrm>
-          <a:prstGeom prst="rect">
-            <a:avLst/>
-          </a:prstGeom>
-        </p:spPr>
-      </p:pic>
-      <p:sp>
-        <p:nvSpPr>
-          <p:cNvPr id="8" name="Rounded Rectangle 7"/>
-          <p:cNvSpPr/>
-          <p:nvPr/>
-        </p:nvSpPr>
-        <p:spPr>
-          <a:xfrm>
-            <a:off x="7680960" y="1508760"/>
-            <a:ext cx="3611880" cy="1828800"/>
-          </a:xfrm>
-          <a:prstGeom prst="roundRect">
-            <a:avLst/>
-          </a:prstGeom>
-          <a:solidFill>
-            <a:srgbClr val="F1F5F9"/>
-          </a:solidFill>
-          <a:ln>
-            <a:solidFill>
-              <a:srgbClr val="24888E"/>
-            </a:solidFill>
-          </a:ln>
-        </p:spPr>
-        <p:style>
-          <a:lnRef idx="1">
-            <a:schemeClr val="accent1"/>
-          </a:lnRef>
-          <a:fillRef idx="3">
-            <a:schemeClr val="accent1"/>
-          </a:fillRef>
-          <a:effectRef idx="2">
-            <a:schemeClr val="accent1"/>
-          </a:effectRef>
-          <a:fontRef idx="minor">
-            <a:schemeClr val="lt1"/>
-          </a:fontRef>
-        </p:style>
-        <p:txBody>
-          <a:bodyPr rtlCol="0" anchor="ctr"/>
-          <a:lstStyle/>
-          <a:p>
-            <a:pPr algn="ctr"/>
-            <a:endParaRPr/>
-          </a:p>
-        </p:txBody>
-      </p:sp>
-      <p:sp>
-        <p:nvSpPr>
-          <p:cNvPr id="9" name="TextBox 8"/>
-          <p:cNvSpPr txBox="1"/>
-          <p:nvPr/>
-        </p:nvSpPr>
-        <p:spPr>
-          <a:xfrm>
-            <a:off x="7827264" y="1600200"/>
-            <a:ext cx="3319272" cy="219456"/>
-          </a:xfrm>
-          <a:prstGeom prst="rect">
-            <a:avLst/>
-          </a:prstGeom>
-          <a:noFill/>
-        </p:spPr>
-        <p:txBody>
-          <a:bodyPr wrap="square">
-            <a:spAutoFit/>
-          </a:bodyPr>
-          <a:lstStyle/>
-          <a:p>
-            <a:pPr algn="l"/>
-            <a:r>
-              <a:rPr sz="1100" b="1">
-                <a:solidFill>
-                  <a:srgbClr val="24888E"/>
-                </a:solidFill>
-                <a:latin typeface="Aptos"/>
-              </a:rPr>
-              <a:t>Verification</a:t>
-            </a:r>
-          </a:p>
-        </p:txBody>
-      </p:sp>
-      <p:sp>
-        <p:nvSpPr>
-          <p:cNvPr id="10" name="TextBox 9"/>
-          <p:cNvSpPr txBox="1"/>
-          <p:nvPr/>
-        </p:nvSpPr>
-        <p:spPr>
-          <a:xfrm>
-            <a:off x="7827264" y="1865376"/>
-            <a:ext cx="3319272" cy="1380744"/>
-          </a:xfrm>
-          <a:prstGeom prst="rect">
-            <a:avLst/>
-          </a:prstGeom>
-          <a:noFill/>
-        </p:spPr>
-        <p:txBody>
-          <a:bodyPr wrap="square">
-            <a:spAutoFit/>
-          </a:bodyPr>
-          <a:lstStyle/>
-          <a:p>
-            <a:pPr algn="l"/>
-            <a:r>
-              <a:rPr sz="1700" b="0">
-                <a:solidFill>
-                  <a:srgbClr val="191E26"/>
-                </a:solidFill>
-                <a:latin typeface="Aptos"/>
-              </a:rPr>
-              <a:t>The direct time-domain FIR and FFT overlap-add traces lie on top of one another to numerical precision.</a:t>
-            </a:r>
-          </a:p>
-        </p:txBody>
-      </p:sp>
-      <p:sp>
-        <p:nvSpPr>
-          <p:cNvPr id="11" name="TextBox 10"/>
-          <p:cNvSpPr txBox="1"/>
-          <p:nvPr/>
-        </p:nvSpPr>
-        <p:spPr>
-          <a:xfrm>
-            <a:off x="7726679" y="3840480"/>
-            <a:ext cx="3383280" cy="731520"/>
-          </a:xfrm>
-          <a:prstGeom prst="rect">
-            <a:avLst/>
-          </a:prstGeom>
-          <a:noFill/>
-        </p:spPr>
-        <p:txBody>
-          <a:bodyPr wrap="square">
-            <a:spAutoFit/>
-          </a:bodyPr>
-          <a:lstStyle/>
-          <a:p>
-            <a:pPr algn="l"/>
-            <a:r>
-              <a:rPr sz="2000" b="1">
-                <a:solidFill>
-                  <a:srgbClr val="16253E"/>
-                </a:solidFill>
-                <a:latin typeface="Aptos"/>
-              </a:rPr>
-              <a:t>This equivalence should be a coding unit test.</a:t>
-            </a:r>
-          </a:p>
-        </p:txBody>
-      </p:sp>
+          <p:cNvPr id="2" name="TextBox 1">
+            <a:extLst>
+              <a:ext uri="{FF2B5EF4-FFF2-40B4-BE49-F238E27FC236}">
+                <a16:creationId xmlns:a16="http://schemas.microsoft.com/office/drawing/2014/main" id="{B3728B8D-495C-9403-A36C-1446EC36600C}"/>
+              </a:ext>
+            </a:extLst>
+          </p:cNvPr>
+          <p:cNvSpPr txBox="1"/>
+          <p:nvPr/>
+        </p:nvSpPr>
+        <p:spPr>
+          <a:xfrm>
+            <a:off x="600740" y="441251"/>
+            <a:ext cx="7871707" cy="523220"/>
+          </a:xfrm>
+          <a:prstGeom prst="rect">
+            <a:avLst/>
+          </a:prstGeom>
+          <a:noFill/>
+        </p:spPr>
+        <p:txBody>
+          <a:bodyPr wrap="none" rtlCol="0">
+            <a:spAutoFit/>
+          </a:bodyPr>
+          <a:lstStyle/>
+          <a:p>
+            <a:r>
+              <a:rPr lang="en-US" sz="2800" b="1" dirty="0"/>
+              <a:t>Overlap-Add Example </a:t>
+            </a:r>
+            <a:r>
+              <a:rPr lang="en-US" dirty="0"/>
+              <a:t>     B=3,  </a:t>
+            </a:r>
+            <a:r>
+              <a:rPr lang="en-US" dirty="0" err="1"/>
+              <a:t>Lh</a:t>
+            </a:r>
+            <a:r>
+              <a:rPr lang="en-US" dirty="0"/>
+              <a:t>=2,  NFFT=B+Lh-1=4,     h[n]=[h0, h1]</a:t>
+            </a:r>
+          </a:p>
+        </p:txBody>
+      </p:sp>
+      <p:sp>
+        <p:nvSpPr>
+          <p:cNvPr id="3" name="TextBox 2">
+            <a:extLst>
+              <a:ext uri="{FF2B5EF4-FFF2-40B4-BE49-F238E27FC236}">
+                <a16:creationId xmlns:a16="http://schemas.microsoft.com/office/drawing/2014/main" id="{F3D32A5E-ED1D-9C87-6AA0-379012EE9CE4}"/>
+              </a:ext>
+            </a:extLst>
+          </p:cNvPr>
+          <p:cNvSpPr txBox="1"/>
+          <p:nvPr/>
+        </p:nvSpPr>
+        <p:spPr>
+          <a:xfrm>
+            <a:off x="600740" y="1467293"/>
+            <a:ext cx="9617149" cy="2970044"/>
+          </a:xfrm>
+          <a:prstGeom prst="rect">
+            <a:avLst/>
+          </a:prstGeom>
+          <a:noFill/>
+        </p:spPr>
+        <p:txBody>
+          <a:bodyPr wrap="square" rtlCol="0">
+            <a:spAutoFit/>
+          </a:bodyPr>
+          <a:lstStyle/>
+          <a:p>
+            <a:r>
+              <a:rPr lang="en-US" sz="1100" dirty="0">
+                <a:latin typeface="Aptos Mono" panose="020B0009020202020204" pitchFamily="49" charset="0"/>
+              </a:rPr>
+              <a:t>x[n]-&gt;   </a:t>
+            </a:r>
+            <a:r>
+              <a:rPr lang="en-US" sz="1100" dirty="0">
+                <a:solidFill>
+                  <a:srgbClr val="0070C0"/>
+                </a:solidFill>
+                <a:latin typeface="Aptos Mono" panose="020B0009020202020204" pitchFamily="49" charset="0"/>
+              </a:rPr>
+              <a:t>x0   x1   x2</a:t>
+            </a:r>
+            <a:r>
+              <a:rPr lang="en-US" sz="1100" dirty="0">
+                <a:latin typeface="Aptos Mono" panose="020B0009020202020204" pitchFamily="49" charset="0"/>
+              </a:rPr>
+              <a:t>                   </a:t>
+            </a:r>
+            <a:r>
+              <a:rPr lang="en-US" sz="1100" dirty="0">
+                <a:solidFill>
+                  <a:srgbClr val="00B050"/>
+                </a:solidFill>
+                <a:latin typeface="Aptos Mono" panose="020B0009020202020204" pitchFamily="49" charset="0"/>
+              </a:rPr>
+              <a:t>x3   x4   x5</a:t>
+            </a:r>
+            <a:r>
+              <a:rPr lang="en-US" sz="1100" dirty="0">
+                <a:latin typeface="Aptos Mono" panose="020B0009020202020204" pitchFamily="49" charset="0"/>
+              </a:rPr>
+              <a:t>                   </a:t>
+            </a:r>
+            <a:r>
+              <a:rPr lang="en-US" sz="1100" dirty="0">
+                <a:solidFill>
+                  <a:srgbClr val="7030A0"/>
+                </a:solidFill>
+                <a:latin typeface="Aptos Mono" panose="020B0009020202020204" pitchFamily="49" charset="0"/>
+              </a:rPr>
+              <a:t>x6  x7  x8</a:t>
+            </a:r>
+            <a:r>
+              <a:rPr lang="en-US" sz="1100" dirty="0">
+                <a:latin typeface="Aptos Mono" panose="020B0009020202020204" pitchFamily="49" charset="0"/>
+              </a:rPr>
+              <a:t>                     </a:t>
+            </a:r>
+            <a:r>
+              <a:rPr lang="en-US" sz="1100" dirty="0">
+                <a:solidFill>
+                  <a:srgbClr val="FF0000"/>
+                </a:solidFill>
+                <a:latin typeface="Aptos Mono" panose="020B0009020202020204" pitchFamily="49" charset="0"/>
+              </a:rPr>
+              <a:t>x9  ……</a:t>
+            </a:r>
+          </a:p>
+          <a:p>
+            <a:endParaRPr lang="en-US" sz="1100" dirty="0">
+              <a:latin typeface="Aptos Mono" panose="020B0009020202020204" pitchFamily="49" charset="0"/>
+            </a:endParaRPr>
+          </a:p>
+          <a:p>
+            <a:r>
+              <a:rPr lang="en-US" sz="1100" dirty="0">
+                <a:latin typeface="Aptos Mono" panose="020B0009020202020204" pitchFamily="49" charset="0"/>
+              </a:rPr>
+              <a:t>         *h[n]                          *h[n]                          *h[n]                          *h[n] </a:t>
+            </a:r>
+          </a:p>
+          <a:p>
+            <a:endParaRPr lang="en-US" sz="1100" dirty="0">
+              <a:latin typeface="Aptos Mono" panose="020B0009020202020204" pitchFamily="49" charset="0"/>
+            </a:endParaRPr>
+          </a:p>
+          <a:p>
+            <a:r>
+              <a:rPr lang="en-US" sz="1100" dirty="0">
+                <a:latin typeface="Aptos Mono" panose="020B0009020202020204" pitchFamily="49" charset="0"/>
+              </a:rPr>
+              <a:t>         </a:t>
+            </a:r>
+            <a:r>
+              <a:rPr lang="en-US" sz="1100" dirty="0">
+                <a:solidFill>
+                  <a:srgbClr val="0070C0"/>
+                </a:solidFill>
+                <a:latin typeface="Aptos Mono" panose="020B0009020202020204" pitchFamily="49" charset="0"/>
+              </a:rPr>
+              <a:t>x0h0 x0h1</a:t>
+            </a:r>
+            <a:r>
+              <a:rPr lang="en-US" sz="1100" dirty="0">
+                <a:latin typeface="Aptos Mono" panose="020B0009020202020204" pitchFamily="49" charset="0"/>
+              </a:rPr>
+              <a:t>                      </a:t>
+            </a:r>
+            <a:r>
+              <a:rPr lang="en-US" sz="1100" dirty="0">
+                <a:solidFill>
+                  <a:srgbClr val="00B050"/>
+                </a:solidFill>
+                <a:latin typeface="Aptos Mono" panose="020B0009020202020204" pitchFamily="49" charset="0"/>
+              </a:rPr>
+              <a:t>x3h0 x3h1</a:t>
+            </a:r>
+            <a:r>
+              <a:rPr lang="en-US" sz="1100" dirty="0">
+                <a:latin typeface="Aptos Mono" panose="020B0009020202020204" pitchFamily="49" charset="0"/>
+              </a:rPr>
+              <a:t>                      </a:t>
+            </a:r>
+            <a:r>
+              <a:rPr lang="en-US" sz="1100" dirty="0">
+                <a:solidFill>
+                  <a:srgbClr val="7030A0"/>
+                </a:solidFill>
+                <a:latin typeface="Aptos Mono" panose="020B0009020202020204" pitchFamily="49" charset="0"/>
+              </a:rPr>
+              <a:t>x6h0 x6h1</a:t>
+            </a:r>
+            <a:r>
+              <a:rPr lang="en-US" sz="1100" dirty="0">
+                <a:latin typeface="Aptos Mono" panose="020B0009020202020204" pitchFamily="49" charset="0"/>
+              </a:rPr>
+              <a:t>                      </a:t>
+            </a:r>
+            <a:r>
+              <a:rPr lang="en-US" sz="1100" dirty="0">
+                <a:solidFill>
+                  <a:srgbClr val="FF0000"/>
+                </a:solidFill>
+                <a:latin typeface="Aptos Mono" panose="020B0009020202020204" pitchFamily="49" charset="0"/>
+              </a:rPr>
+              <a:t>x9h0 ……</a:t>
+            </a:r>
+          </a:p>
+          <a:p>
+            <a:r>
+              <a:rPr lang="en-US" sz="1100" dirty="0">
+                <a:latin typeface="Aptos Mono" panose="020B0009020202020204" pitchFamily="49" charset="0"/>
+              </a:rPr>
+              <a:t>              </a:t>
+            </a:r>
+            <a:r>
+              <a:rPr lang="en-US" sz="1100" dirty="0">
+                <a:solidFill>
+                  <a:srgbClr val="0070C0"/>
+                </a:solidFill>
+                <a:latin typeface="Aptos Mono" panose="020B0009020202020204" pitchFamily="49" charset="0"/>
+              </a:rPr>
+              <a:t>x1h0 x1h1</a:t>
+            </a:r>
+            <a:r>
+              <a:rPr lang="en-US" sz="1100" dirty="0">
+                <a:latin typeface="Aptos Mono" panose="020B0009020202020204" pitchFamily="49" charset="0"/>
+              </a:rPr>
+              <a:t>                      </a:t>
+            </a:r>
+            <a:r>
+              <a:rPr lang="en-US" sz="1100" dirty="0">
+                <a:solidFill>
+                  <a:srgbClr val="00B050"/>
+                </a:solidFill>
+                <a:latin typeface="Aptos Mono" panose="020B0009020202020204" pitchFamily="49" charset="0"/>
+              </a:rPr>
+              <a:t>x4h0 x4h1</a:t>
+            </a:r>
+            <a:r>
+              <a:rPr lang="en-US" sz="1100" dirty="0">
+                <a:latin typeface="Aptos Mono" panose="020B0009020202020204" pitchFamily="49" charset="0"/>
+              </a:rPr>
+              <a:t>                      </a:t>
+            </a:r>
+            <a:r>
+              <a:rPr lang="en-US" sz="1100" dirty="0">
+                <a:solidFill>
+                  <a:srgbClr val="7030A0"/>
+                </a:solidFill>
+                <a:latin typeface="Aptos Mono" panose="020B0009020202020204" pitchFamily="49" charset="0"/>
+              </a:rPr>
+              <a:t>x7h0 x7h1</a:t>
+            </a:r>
+          </a:p>
+          <a:p>
+            <a:r>
+              <a:rPr lang="en-US" sz="1100" dirty="0">
+                <a:latin typeface="Aptos Mono" panose="020B0009020202020204" pitchFamily="49" charset="0"/>
+              </a:rPr>
+              <a:t>                   </a:t>
+            </a:r>
+            <a:r>
+              <a:rPr lang="en-US" sz="1100" dirty="0">
+                <a:solidFill>
+                  <a:srgbClr val="0070C0"/>
+                </a:solidFill>
+                <a:latin typeface="Aptos Mono" panose="020B0009020202020204" pitchFamily="49" charset="0"/>
+              </a:rPr>
+              <a:t>x2h0 x2h1</a:t>
+            </a:r>
+            <a:r>
+              <a:rPr lang="en-US" sz="1100" dirty="0">
+                <a:latin typeface="Aptos Mono" panose="020B0009020202020204" pitchFamily="49" charset="0"/>
+              </a:rPr>
+              <a:t>                      </a:t>
+            </a:r>
+            <a:r>
+              <a:rPr lang="en-US" sz="1100" dirty="0">
+                <a:solidFill>
+                  <a:srgbClr val="00B050"/>
+                </a:solidFill>
+                <a:latin typeface="Aptos Mono" panose="020B0009020202020204" pitchFamily="49" charset="0"/>
+              </a:rPr>
+              <a:t>x5h0 x5h1</a:t>
+            </a:r>
+            <a:r>
+              <a:rPr lang="en-US" sz="1100" dirty="0">
+                <a:latin typeface="Aptos Mono" panose="020B0009020202020204" pitchFamily="49" charset="0"/>
+              </a:rPr>
+              <a:t>                      </a:t>
+            </a:r>
+            <a:r>
+              <a:rPr lang="en-US" sz="1100" dirty="0">
+                <a:solidFill>
+                  <a:srgbClr val="7030A0"/>
+                </a:solidFill>
+                <a:latin typeface="Aptos Mono" panose="020B0009020202020204" pitchFamily="49" charset="0"/>
+              </a:rPr>
+              <a:t>x8h0 x8h1</a:t>
+            </a:r>
+          </a:p>
+          <a:p>
+            <a:r>
+              <a:rPr lang="en-US" sz="1100" dirty="0">
+                <a:latin typeface="Aptos Mono" panose="020B0009020202020204" pitchFamily="49" charset="0"/>
+              </a:rPr>
+              <a:t>         -----------------------------  -----------------------------  -----------------------------  -------</a:t>
+            </a:r>
+          </a:p>
+          <a:p>
+            <a:r>
+              <a:rPr lang="en-US" sz="1100" dirty="0">
+                <a:latin typeface="Aptos Mono" panose="020B0009020202020204" pitchFamily="49" charset="0"/>
+              </a:rPr>
+              <a:t>         </a:t>
+            </a:r>
+            <a:r>
+              <a:rPr lang="en-US" sz="1100" dirty="0">
+                <a:solidFill>
+                  <a:srgbClr val="0070C0"/>
+                </a:solidFill>
+                <a:latin typeface="Aptos Mono" panose="020B0009020202020204" pitchFamily="49" charset="0"/>
+              </a:rPr>
+              <a:t>x0h0 x0h1+x1h0 x1h1+x2h0 x2h1</a:t>
+            </a:r>
+            <a:r>
+              <a:rPr lang="en-US" sz="1100" dirty="0">
+                <a:latin typeface="Aptos Mono" panose="020B0009020202020204" pitchFamily="49" charset="0"/>
+              </a:rPr>
+              <a:t>  </a:t>
+            </a:r>
+            <a:r>
+              <a:rPr lang="en-US" sz="1100" dirty="0">
+                <a:solidFill>
+                  <a:srgbClr val="00B050"/>
+                </a:solidFill>
+                <a:latin typeface="Aptos Mono" panose="020B0009020202020204" pitchFamily="49" charset="0"/>
+              </a:rPr>
+              <a:t>x3h0 x3h1+x4h0 x4h1+x5h0 x5h1</a:t>
+            </a:r>
+            <a:r>
+              <a:rPr lang="en-US" sz="1100" dirty="0">
+                <a:latin typeface="Aptos Mono" panose="020B0009020202020204" pitchFamily="49" charset="0"/>
+              </a:rPr>
+              <a:t>  </a:t>
+            </a:r>
+            <a:r>
+              <a:rPr lang="en-US" sz="1100" dirty="0">
+                <a:solidFill>
+                  <a:srgbClr val="7030A0"/>
+                </a:solidFill>
+                <a:latin typeface="Aptos Mono" panose="020B0009020202020204" pitchFamily="49" charset="0"/>
+              </a:rPr>
+              <a:t>x6h0 x6h1+x7h0 x7h1+x8h0 x8h1</a:t>
+            </a:r>
+            <a:r>
+              <a:rPr lang="en-US" sz="1100" dirty="0">
+                <a:latin typeface="Aptos Mono" panose="020B0009020202020204" pitchFamily="49" charset="0"/>
+              </a:rPr>
+              <a:t>  </a:t>
+            </a:r>
+            <a:r>
+              <a:rPr lang="en-US" sz="1100" dirty="0">
+                <a:solidFill>
+                  <a:srgbClr val="FF0000"/>
+                </a:solidFill>
+                <a:latin typeface="Aptos Mono" panose="020B0009020202020204" pitchFamily="49" charset="0"/>
+              </a:rPr>
+              <a:t>x9h0 ……</a:t>
+            </a:r>
+          </a:p>
+          <a:p>
+            <a:endParaRPr lang="en-US" sz="1100" dirty="0">
+              <a:latin typeface="Aptos Mono" panose="020B0009020202020204" pitchFamily="49" charset="0"/>
+            </a:endParaRPr>
+          </a:p>
+          <a:p>
+            <a:endParaRPr lang="en-US" sz="1100" dirty="0">
+              <a:latin typeface="Aptos Mono" panose="020B0009020202020204" pitchFamily="49" charset="0"/>
+            </a:endParaRPr>
+          </a:p>
+          <a:p>
+            <a:r>
+              <a:rPr lang="en-US" sz="1100" dirty="0">
+                <a:latin typeface="Aptos Mono" panose="020B0009020202020204" pitchFamily="49" charset="0"/>
+              </a:rPr>
+              <a:t>overlap  </a:t>
+            </a:r>
+            <a:r>
+              <a:rPr lang="en-US" sz="1100" dirty="0">
+                <a:solidFill>
+                  <a:srgbClr val="0070C0"/>
+                </a:solidFill>
+                <a:latin typeface="Aptos Mono" panose="020B0009020202020204" pitchFamily="49" charset="0"/>
+              </a:rPr>
+              <a:t>x0h0 x0h1+x1h0 x1h1+x2h0 x2h1</a:t>
+            </a:r>
+          </a:p>
+          <a:p>
+            <a:r>
+              <a:rPr lang="en-US" sz="1100" dirty="0">
+                <a:latin typeface="Aptos Mono" panose="020B0009020202020204" pitchFamily="49" charset="0"/>
+              </a:rPr>
+              <a:t>and add                           </a:t>
+            </a:r>
+            <a:r>
+              <a:rPr lang="en-US" sz="1100" dirty="0">
+                <a:solidFill>
+                  <a:srgbClr val="00B050"/>
+                </a:solidFill>
+                <a:latin typeface="Aptos Mono" panose="020B0009020202020204" pitchFamily="49" charset="0"/>
+              </a:rPr>
+              <a:t>x3h0 x3h1+x4h0 x4h1+x5h0 x5h1</a:t>
+            </a:r>
+          </a:p>
+          <a:p>
+            <a:r>
+              <a:rPr lang="en-US" sz="1100" dirty="0">
+                <a:latin typeface="Aptos Mono" panose="020B0009020202020204" pitchFamily="49" charset="0"/>
+              </a:rPr>
+              <a:t>                                                           </a:t>
+            </a:r>
+            <a:r>
+              <a:rPr lang="en-US" sz="1100" dirty="0">
+                <a:solidFill>
+                  <a:srgbClr val="7030A0"/>
+                </a:solidFill>
+                <a:latin typeface="Aptos Mono" panose="020B0009020202020204" pitchFamily="49" charset="0"/>
+              </a:rPr>
+              <a:t>x6h0 x6h1+x7h0 x7h1+x8h0 x8h1</a:t>
+            </a:r>
+          </a:p>
+          <a:p>
+            <a:r>
+              <a:rPr lang="en-US" sz="1100" dirty="0">
+                <a:latin typeface="Aptos Mono" panose="020B0009020202020204" pitchFamily="49" charset="0"/>
+              </a:rPr>
+              <a:t>                                                                                    x9h0 ……</a:t>
+            </a:r>
+          </a:p>
+          <a:p>
+            <a:endParaRPr lang="en-US" sz="1100" dirty="0">
+              <a:latin typeface="Aptos Mono" panose="020B0009020202020204" pitchFamily="49" charset="0"/>
+            </a:endParaRPr>
+          </a:p>
+          <a:p>
+            <a:r>
+              <a:rPr lang="en-US" sz="1100" dirty="0">
+                <a:latin typeface="Aptos Mono" panose="020B0009020202020204" pitchFamily="49" charset="0"/>
+              </a:rPr>
+              <a:t>y[n]-&gt;   </a:t>
+            </a:r>
+            <a:r>
+              <a:rPr lang="en-US" sz="1100" dirty="0">
+                <a:solidFill>
+                  <a:srgbClr val="0070C0"/>
+                </a:solidFill>
+                <a:latin typeface="Aptos Mono" panose="020B0009020202020204" pitchFamily="49" charset="0"/>
+              </a:rPr>
+              <a:t>x0h0 x0h1+x1h0 x1h1+x2h0 x2h1</a:t>
+            </a:r>
+            <a:r>
+              <a:rPr lang="en-US" sz="1100" dirty="0">
+                <a:latin typeface="Aptos Mono" panose="020B0009020202020204" pitchFamily="49" charset="0"/>
+              </a:rPr>
+              <a:t>+</a:t>
+            </a:r>
+            <a:r>
+              <a:rPr lang="en-US" sz="1100" dirty="0">
+                <a:solidFill>
+                  <a:srgbClr val="00B050"/>
+                </a:solidFill>
+                <a:latin typeface="Aptos Mono" panose="020B0009020202020204" pitchFamily="49" charset="0"/>
+              </a:rPr>
+              <a:t>x3h0 x3h1+x4h0 x4h1+x5h0 x5h1</a:t>
+            </a:r>
+            <a:r>
+              <a:rPr lang="en-US" sz="1100" dirty="0">
+                <a:latin typeface="Aptos Mono" panose="020B0009020202020204" pitchFamily="49" charset="0"/>
+              </a:rPr>
+              <a:t>+</a:t>
+            </a:r>
+            <a:r>
+              <a:rPr lang="en-US" sz="1100" dirty="0">
+                <a:solidFill>
+                  <a:srgbClr val="7030A0"/>
+                </a:solidFill>
+                <a:latin typeface="Aptos Mono" panose="020B0009020202020204" pitchFamily="49" charset="0"/>
+              </a:rPr>
+              <a:t>x6h0 x6h1+x7h0 x7h1+x8h0 x8h1</a:t>
+            </a:r>
+            <a:r>
+              <a:rPr lang="en-US" sz="1100" dirty="0">
+                <a:latin typeface="Aptos Mono" panose="020B0009020202020204" pitchFamily="49" charset="0"/>
+              </a:rPr>
+              <a:t>+</a:t>
+            </a:r>
+            <a:r>
+              <a:rPr lang="en-US" sz="1100" dirty="0">
+                <a:solidFill>
+                  <a:srgbClr val="FF0000"/>
+                </a:solidFill>
+                <a:latin typeface="Aptos Mono" panose="020B0009020202020204" pitchFamily="49" charset="0"/>
+              </a:rPr>
+              <a:t>x9h0 ……</a:t>
+            </a:r>
+          </a:p>
+        </p:txBody>
+      </p:sp>
+      <mc:AlternateContent xmlns:mc="http://schemas.openxmlformats.org/markup-compatibility/2006" xmlns:a14="http://schemas.microsoft.com/office/drawing/2010/main">
+        <mc:Choice Requires="a14">
+          <p:sp>
+            <p:nvSpPr>
+              <p:cNvPr id="4" name="TextBox 3">
+                <a:extLst>
+                  <a:ext uri="{FF2B5EF4-FFF2-40B4-BE49-F238E27FC236}">
+                    <a16:creationId xmlns:a16="http://schemas.microsoft.com/office/drawing/2014/main" id="{D51FA559-CC4C-5385-3177-FBCE63F42807}"/>
+                  </a:ext>
+                </a:extLst>
+              </p:cNvPr>
+              <p:cNvSpPr txBox="1"/>
+              <p:nvPr/>
+            </p:nvSpPr>
+            <p:spPr>
+              <a:xfrm>
+                <a:off x="600740" y="4940159"/>
+                <a:ext cx="4418581" cy="784254"/>
+              </a:xfrm>
+              <a:prstGeom prst="rect">
+                <a:avLst/>
+              </a:prstGeom>
+              <a:noFill/>
+            </p:spPr>
+            <p:txBody>
+              <a:bodyPr wrap="none" rtlCol="0">
+                <a:spAutoFit/>
+              </a:bodyPr>
+              <a:lstStyle/>
+              <a:p>
+                <a:pPr/>
+                <a14:m>
+                  <m:oMathPara xmlns:m="http://schemas.openxmlformats.org/officeDocument/2006/math">
+                    <m:oMath>
+                      <m:r>
+                        <a:rPr lang="en-US" sz="1600" b="0" i="1" smtClean="0">
+                          <a:latin typeface="Cambria Math" panose="02040503050406030204" pitchFamily="18" charset="0"/>
+                        </a:rPr>
+                        <m:t>𝑦</m:t>
+                      </m:r>
+                      <m:d>
+                        <m:dPr>
+                          <m:begChr m:val="["/>
+                          <m:endChr m:val="]"/>
+                          <m:ctrlPr>
+                            <a:rPr lang="en-US" sz="1600" b="0" i="1" smtClean="0">
+                              <a:latin typeface="Cambria Math" panose="02040503050406030204" pitchFamily="18" charset="0"/>
+                            </a:rPr>
+                          </m:ctrlPr>
+                        </m:dPr>
+                        <m:e>
+                          <m:r>
+                            <a:rPr lang="en-US" sz="1600" b="0" i="1" smtClean="0">
+                              <a:latin typeface="Cambria Math" panose="02040503050406030204" pitchFamily="18" charset="0"/>
+                            </a:rPr>
+                            <m:t>𝑛</m:t>
+                          </m:r>
+                        </m:e>
+                      </m:d>
+                      <m:r>
+                        <a:rPr lang="en-US" sz="1600" b="0" i="1" smtClean="0">
+                          <a:latin typeface="Cambria Math" panose="02040503050406030204" pitchFamily="18" charset="0"/>
+                        </a:rPr>
+                        <m:t>=</m:t>
+                      </m:r>
+                      <m:nary>
+                        <m:naryPr>
+                          <m:chr m:val="∑"/>
+                          <m:ctrlPr>
+                            <a:rPr lang="en-US" sz="1600" b="0" i="1" smtClean="0">
+                              <a:latin typeface="Cambria Math" panose="02040503050406030204" pitchFamily="18" charset="0"/>
+                            </a:rPr>
+                          </m:ctrlPr>
+                        </m:naryPr>
+                        <m:sub>
+                          <m:r>
+                            <m:rPr>
+                              <m:brk m:alnAt="23"/>
+                            </m:rPr>
+                            <a:rPr lang="en-US" sz="1600" b="0" i="1" smtClean="0">
+                              <a:latin typeface="Cambria Math" panose="02040503050406030204" pitchFamily="18" charset="0"/>
+                            </a:rPr>
+                            <m:t>𝑘</m:t>
+                          </m:r>
+                          <m:r>
+                            <m:rPr>
+                              <m:brk m:alnAt="23"/>
+                            </m:rPr>
+                            <a:rPr lang="en-US" sz="1600" b="0" i="1" smtClean="0">
+                              <a:latin typeface="Cambria Math" panose="02040503050406030204" pitchFamily="18" charset="0"/>
+                            </a:rPr>
+                            <m:t>=</m:t>
+                          </m:r>
+                          <m:r>
+                            <m:rPr>
+                              <m:brk m:alnAt="23"/>
+                            </m:rPr>
+                            <a:rPr lang="en-US" sz="1600" b="0" i="1" smtClean="0">
+                              <a:latin typeface="Cambria Math" panose="02040503050406030204" pitchFamily="18" charset="0"/>
+                            </a:rPr>
+                            <m:t>0</m:t>
+                          </m:r>
+                        </m:sub>
+                        <m:sup>
+                          <m:r>
+                            <a:rPr lang="en-US" sz="1600" b="0" i="1" smtClean="0">
+                              <a:latin typeface="Cambria Math" panose="02040503050406030204" pitchFamily="18" charset="0"/>
+                            </a:rPr>
+                            <m:t>1</m:t>
+                          </m:r>
+                        </m:sup>
+                        <m:e>
+                          <m:r>
+                            <a:rPr lang="en-US" sz="1600" b="0" i="1" smtClean="0">
+                              <a:latin typeface="Cambria Math" panose="02040503050406030204" pitchFamily="18" charset="0"/>
+                            </a:rPr>
+                            <m:t>ℎ</m:t>
+                          </m:r>
+                          <m:d>
+                            <m:dPr>
+                              <m:begChr m:val="["/>
+                              <m:endChr m:val="]"/>
+                              <m:ctrlPr>
+                                <a:rPr lang="en-US" sz="1600" b="0" i="1" smtClean="0">
+                                  <a:latin typeface="Cambria Math" panose="02040503050406030204" pitchFamily="18" charset="0"/>
+                                </a:rPr>
+                              </m:ctrlPr>
+                            </m:dPr>
+                            <m:e>
+                              <m:r>
+                                <a:rPr lang="en-US" sz="1600" b="0" i="1" smtClean="0">
+                                  <a:latin typeface="Cambria Math" panose="02040503050406030204" pitchFamily="18" charset="0"/>
+                                </a:rPr>
+                                <m:t>𝑘</m:t>
+                              </m:r>
+                            </m:e>
+                          </m:d>
+                          <m:r>
+                            <a:rPr lang="en-US" sz="1600" b="0" i="1" smtClean="0">
+                              <a:latin typeface="Cambria Math" panose="02040503050406030204" pitchFamily="18" charset="0"/>
+                            </a:rPr>
+                            <m:t>𝑥</m:t>
+                          </m:r>
+                          <m:r>
+                            <a:rPr lang="en-US" sz="1600" b="0" i="1" smtClean="0">
+                              <a:latin typeface="Cambria Math" panose="02040503050406030204" pitchFamily="18" charset="0"/>
+                            </a:rPr>
+                            <m:t>[</m:t>
+                          </m:r>
+                          <m:r>
+                            <a:rPr lang="en-US" sz="1600" b="0" i="1" smtClean="0">
+                              <a:latin typeface="Cambria Math" panose="02040503050406030204" pitchFamily="18" charset="0"/>
+                            </a:rPr>
+                            <m:t>𝑛</m:t>
+                          </m:r>
+                          <m:r>
+                            <a:rPr lang="en-US" sz="1600" b="0" i="1" smtClean="0">
+                              <a:latin typeface="Cambria Math" panose="02040503050406030204" pitchFamily="18" charset="0"/>
+                            </a:rPr>
+                            <m:t>−</m:t>
+                          </m:r>
+                          <m:r>
+                            <a:rPr lang="en-US" sz="1600" b="0" i="1" smtClean="0">
+                              <a:latin typeface="Cambria Math" panose="02040503050406030204" pitchFamily="18" charset="0"/>
+                            </a:rPr>
+                            <m:t>𝑘</m:t>
+                          </m:r>
+                          <m:r>
+                            <a:rPr lang="en-US" sz="1600" b="0" i="1" smtClean="0">
+                              <a:latin typeface="Cambria Math" panose="02040503050406030204" pitchFamily="18" charset="0"/>
+                            </a:rPr>
+                            <m:t>]</m:t>
+                          </m:r>
+                        </m:e>
+                      </m:nary>
+                      <m:r>
+                        <a:rPr lang="en-US" sz="1600" b="0" i="1" smtClean="0">
+                          <a:latin typeface="Cambria Math" panose="02040503050406030204" pitchFamily="18" charset="0"/>
+                        </a:rPr>
+                        <m:t>=</m:t>
+                      </m:r>
+                      <m:nary>
+                        <m:naryPr>
+                          <m:chr m:val="∑"/>
+                          <m:ctrlPr>
+                            <a:rPr lang="en-US" sz="1600" b="0" i="1" smtClean="0">
+                              <a:latin typeface="Cambria Math" panose="02040503050406030204" pitchFamily="18" charset="0"/>
+                            </a:rPr>
+                          </m:ctrlPr>
+                        </m:naryPr>
+                        <m:sub>
+                          <m:r>
+                            <m:rPr>
+                              <m:brk m:alnAt="23"/>
+                            </m:rPr>
+                            <a:rPr lang="en-US" sz="1600" b="0" i="1" smtClean="0">
+                              <a:latin typeface="Cambria Math" panose="02040503050406030204" pitchFamily="18" charset="0"/>
+                            </a:rPr>
+                            <m:t>𝑚</m:t>
+                          </m:r>
+                          <m:r>
+                            <m:rPr>
+                              <m:brk m:alnAt="23"/>
+                            </m:rPr>
+                            <a:rPr lang="en-US" sz="1600" b="0" i="1" smtClean="0">
+                              <a:latin typeface="Cambria Math" panose="02040503050406030204" pitchFamily="18" charset="0"/>
+                            </a:rPr>
+                            <m:t>=</m:t>
+                          </m:r>
+                          <m:r>
+                            <m:rPr>
+                              <m:brk m:alnAt="23"/>
+                            </m:rPr>
+                            <a:rPr lang="en-US" sz="1600" b="0" i="1" smtClean="0">
+                              <a:latin typeface="Cambria Math" panose="02040503050406030204" pitchFamily="18" charset="0"/>
+                            </a:rPr>
+                            <m:t>𝑛</m:t>
+                          </m:r>
+                          <m:r>
+                            <m:rPr>
+                              <m:brk m:alnAt="23"/>
+                            </m:rPr>
+                            <a:rPr lang="en-US" sz="1600" b="0" i="1" smtClean="0">
+                              <a:latin typeface="Cambria Math" panose="02040503050406030204" pitchFamily="18" charset="0"/>
+                            </a:rPr>
+                            <m:t>−</m:t>
+                          </m:r>
+                          <m:r>
+                            <m:rPr>
+                              <m:brk m:alnAt="23"/>
+                            </m:rPr>
+                            <a:rPr lang="en-US" sz="1600" b="0" i="1" smtClean="0">
+                              <a:latin typeface="Cambria Math" panose="02040503050406030204" pitchFamily="18" charset="0"/>
+                            </a:rPr>
+                            <m:t>1</m:t>
+                          </m:r>
+                        </m:sub>
+                        <m:sup>
+                          <m:r>
+                            <a:rPr lang="en-US" sz="1600" b="0" i="1" smtClean="0">
+                              <a:latin typeface="Cambria Math" panose="02040503050406030204" pitchFamily="18" charset="0"/>
+                            </a:rPr>
+                            <m:t>𝑛</m:t>
+                          </m:r>
+                        </m:sup>
+                        <m:e>
+                          <m:r>
+                            <a:rPr lang="en-US" sz="1600" b="0" i="1" smtClean="0">
+                              <a:latin typeface="Cambria Math" panose="02040503050406030204" pitchFamily="18" charset="0"/>
+                            </a:rPr>
+                            <m:t>𝑥</m:t>
+                          </m:r>
+                          <m:d>
+                            <m:dPr>
+                              <m:begChr m:val="["/>
+                              <m:endChr m:val="]"/>
+                              <m:ctrlPr>
+                                <a:rPr lang="en-US" sz="1600" b="0" i="1" smtClean="0">
+                                  <a:latin typeface="Cambria Math" panose="02040503050406030204" pitchFamily="18" charset="0"/>
+                                </a:rPr>
+                              </m:ctrlPr>
+                            </m:dPr>
+                            <m:e>
+                              <m:r>
+                                <a:rPr lang="en-US" sz="1600" b="0" i="1" smtClean="0">
+                                  <a:latin typeface="Cambria Math" panose="02040503050406030204" pitchFamily="18" charset="0"/>
+                                </a:rPr>
+                                <m:t>𝑚</m:t>
+                              </m:r>
+                            </m:e>
+                          </m:d>
+                          <m:r>
+                            <a:rPr lang="en-US" sz="1600" b="0" i="1" smtClean="0">
+                              <a:latin typeface="Cambria Math" panose="02040503050406030204" pitchFamily="18" charset="0"/>
+                            </a:rPr>
+                            <m:t>ℎ</m:t>
+                          </m:r>
+                          <m:r>
+                            <a:rPr lang="en-US" sz="1600" b="0" i="1" smtClean="0">
+                              <a:latin typeface="Cambria Math" panose="02040503050406030204" pitchFamily="18" charset="0"/>
+                            </a:rPr>
+                            <m:t>[</m:t>
+                          </m:r>
+                          <m:r>
+                            <a:rPr lang="en-US" sz="1600" b="0" i="1" smtClean="0">
+                              <a:latin typeface="Cambria Math" panose="02040503050406030204" pitchFamily="18" charset="0"/>
+                            </a:rPr>
+                            <m:t>𝑛</m:t>
+                          </m:r>
+                          <m:r>
+                            <a:rPr lang="en-US" sz="1600" b="0" i="1" smtClean="0">
+                              <a:latin typeface="Cambria Math" panose="02040503050406030204" pitchFamily="18" charset="0"/>
+                            </a:rPr>
+                            <m:t>−</m:t>
+                          </m:r>
+                          <m:r>
+                            <a:rPr lang="en-US" sz="1600" b="0" i="1" smtClean="0">
+                              <a:latin typeface="Cambria Math" panose="02040503050406030204" pitchFamily="18" charset="0"/>
+                            </a:rPr>
+                            <m:t>𝑚</m:t>
+                          </m:r>
+                          <m:r>
+                            <a:rPr lang="en-US" sz="1600" b="0" i="1" smtClean="0">
+                              <a:latin typeface="Cambria Math" panose="02040503050406030204" pitchFamily="18" charset="0"/>
+                            </a:rPr>
+                            <m:t>]</m:t>
+                          </m:r>
+                        </m:e>
+                      </m:nary>
+                    </m:oMath>
+                  </m:oMathPara>
+                </a14:m>
+                <a:endParaRPr lang="en-US" sz="1600" dirty="0"/>
+              </a:p>
+            </p:txBody>
+          </p:sp>
+        </mc:Choice>
+        <mc:Fallback xmlns="">
+          <p:sp>
+            <p:nvSpPr>
+              <p:cNvPr id="4" name="TextBox 3">
+                <a:extLst>
+                  <a:ext uri="{FF2B5EF4-FFF2-40B4-BE49-F238E27FC236}">
+                    <a16:creationId xmlns:a16="http://schemas.microsoft.com/office/drawing/2014/main" id="{D51FA559-CC4C-5385-3177-FBCE63F42807}"/>
+                  </a:ext>
+                </a:extLst>
+              </p:cNvPr>
+              <p:cNvSpPr txBox="1">
+                <a:spLocks noRot="1" noChangeAspect="1" noMove="1" noResize="1" noEditPoints="1" noAdjustHandles="1" noChangeArrowheads="1" noChangeShapeType="1" noTextEdit="1"/>
+              </p:cNvSpPr>
+              <p:nvPr/>
+            </p:nvSpPr>
+            <p:spPr>
+              <a:xfrm>
+                <a:off x="600740" y="4940159"/>
+                <a:ext cx="4418581" cy="784254"/>
+              </a:xfrm>
+              <a:prstGeom prst="rect">
+                <a:avLst/>
+              </a:prstGeom>
+              <a:blipFill>
+                <a:blip r:embed="rId2"/>
+                <a:stretch>
+                  <a:fillRect/>
+                </a:stretch>
+              </a:blipFill>
+            </p:spPr>
+            <p:txBody>
+              <a:bodyPr/>
+              <a:lstStyle/>
+              <a:p>
+                <a:r>
+                  <a:rPr lang="en-US">
+                    <a:noFill/>
+                  </a:rPr>
+                  <a:t> </a:t>
+                </a:r>
+              </a:p>
+            </p:txBody>
+          </p:sp>
+        </mc:Fallback>
+      </mc:AlternateContent>
     </p:spTree>
+    <p:extLst>
+      <p:ext uri="{BB962C8B-B14F-4D97-AF65-F5344CB8AC3E}">
+        <p14:creationId xmlns:p14="http://schemas.microsoft.com/office/powerpoint/2010/main" val="3084351131"/>
+      </p:ext>
+    </p:extLst>
   </p:cSld>
   <p:clrMapOvr>
     <a:masterClrMapping/>
@@ -5364,7 +5884,7 @@
                 </a:solidFill>
                 <a:latin typeface="Aptos"/>
               </a:rPr>
-              <a:t>Overlap-Save: overlap the input, discard invalid outputs</a:t>
+              <a:t>Overlap-Add gives the same FIR output</a:t>
             </a:r>
           </a:p>
         </p:txBody>
@@ -5399,7 +5919,7 @@
                 </a:solidFill>
                 <a:latin typeface="Aptos"/>
               </a:rPr>
-              <a:t>OVERLAP-SAVE</a:t>
+              <a:t>OVERLAP-ADD</a:t>
             </a:r>
           </a:p>
         </p:txBody>
@@ -5434,7 +5954,7 @@
                 </a:solidFill>
                 <a:latin typeface="Aptos"/>
               </a:rPr>
-              <a:t>0:58–1:06</a:t>
+              <a:t>0:54–0:58</a:t>
             </a:r>
           </a:p>
         </p:txBody>
@@ -5474,109 +5994,30 @@
           </a:p>
         </p:txBody>
       </p:sp>
-      <p:sp>
-        <p:nvSpPr>
-          <p:cNvPr id="7" name="TextBox 6"/>
-          <p:cNvSpPr txBox="1"/>
-          <p:nvPr/>
-        </p:nvSpPr>
-        <p:spPr>
-          <a:xfrm>
-            <a:off x="731520" y="1280160"/>
-            <a:ext cx="6949440" cy="3383280"/>
-          </a:xfrm>
-          <a:prstGeom prst="rect">
-            <a:avLst/>
-          </a:prstGeom>
-          <a:noFill/>
-        </p:spPr>
-        <p:txBody>
-          <a:bodyPr wrap="square">
-            <a:spAutoFit/>
-          </a:bodyPr>
-          <a:lstStyle/>
-          <a:p>
-            <a:pPr>
-              <a:spcAft>
-                <a:spcPts val="700"/>
-              </a:spcAft>
-              <a:defRPr sz="2000">
-                <a:solidFill>
-                  <a:srgbClr val="191E26"/>
-                </a:solidFill>
-                <a:latin typeface="Aptos"/>
-              </a:defRPr>
-            </a:pPr>
-            <a:r>
-              <a:t>• Choose an FFT size NFFT and FIR length Lh.</a:t>
-            </a:r>
-          </a:p>
-          <a:p>
-            <a:pPr>
-              <a:spcAft>
-                <a:spcPts val="700"/>
-              </a:spcAft>
-              <a:defRPr sz="2000">
-                <a:solidFill>
-                  <a:srgbClr val="191E26"/>
-                </a:solidFill>
-                <a:latin typeface="Aptos"/>
-              </a:defRPr>
-            </a:pPr>
-            <a:r>
-              <a:t>• Each input block contains Lh − 1 old samples plus new samples.</a:t>
-            </a:r>
-          </a:p>
-          <a:p>
-            <a:pPr>
-              <a:spcAft>
-                <a:spcPts val="700"/>
-              </a:spcAft>
-              <a:defRPr sz="2000">
-                <a:solidFill>
-                  <a:srgbClr val="191E26"/>
-                </a:solidFill>
-                <a:latin typeface="Aptos"/>
-              </a:defRPr>
-            </a:pPr>
-            <a:r>
-              <a:t>• Perform NFFT-point circular convolution.</a:t>
-            </a:r>
-          </a:p>
-          <a:p>
-            <a:pPr>
-              <a:spcAft>
-                <a:spcPts val="700"/>
-              </a:spcAft>
-              <a:defRPr sz="2000">
-                <a:solidFill>
-                  <a:srgbClr val="191E26"/>
-                </a:solidFill>
-                <a:latin typeface="Aptos"/>
-              </a:defRPr>
-            </a:pPr>
-            <a:r>
-              <a:t>• Discard the first Lh − 1 output samples, which contain time-aliasing contamination.</a:t>
-            </a:r>
-          </a:p>
-          <a:p>
-            <a:pPr>
-              <a:spcAft>
-                <a:spcPts val="700"/>
-              </a:spcAft>
-              <a:defRPr sz="2000">
-                <a:solidFill>
-                  <a:srgbClr val="191E26"/>
-                </a:solidFill>
-                <a:latin typeface="Aptos"/>
-              </a:defRPr>
-            </a:pPr>
-            <a:r>
-              <a:t>• Keep the remaining NFFT − Lh + 1 valid samples.</a:t>
-            </a:r>
-          </a:p>
-        </p:txBody>
-      </p:sp>
+      <p:pic>
+        <p:nvPicPr>
+          <p:cNvPr id="7" name="Picture 6" descr="ola_equivalence.png"/>
+          <p:cNvPicPr>
+            <a:picLocks noChangeAspect="1"/>
+          </p:cNvPicPr>
+          <p:nvPr/>
+        </p:nvPicPr>
+        <p:blipFill>
+          <a:blip r:embed="rId2"/>
+          <a:stretch>
+            <a:fillRect/>
+          </a:stretch>
+        </p:blipFill>
+        <p:spPr>
+          <a:xfrm>
+            <a:off x="594360" y="1234440"/>
+            <a:ext cx="6858000" cy="3291840"/>
+          </a:xfrm>
+          <a:prstGeom prst="rect">
+            <a:avLst/>
+          </a:prstGeom>
+        </p:spPr>
+      </p:pic>
       <p:sp>
         <p:nvSpPr>
           <p:cNvPr id="8" name="Rounded Rectangle 7"/>
@@ -5585,8 +6026,8 @@
         </p:nvSpPr>
         <p:spPr>
           <a:xfrm>
-            <a:off x="7909560" y="1508760"/>
-            <a:ext cx="3383280" cy="1828800"/>
+            <a:off x="7680960" y="1508760"/>
+            <a:ext cx="3611880" cy="1828800"/>
           </a:xfrm>
           <a:prstGeom prst="roundRect">
             <a:avLst/>
@@ -5596,7 +6037,7 @@
           </a:solidFill>
           <a:ln>
             <a:solidFill>
-              <a:srgbClr val="2463A0"/>
+              <a:srgbClr val="24888E"/>
             </a:solidFill>
           </a:ln>
         </p:spPr>
@@ -5631,8 +6072,8 @@
         </p:nvSpPr>
         <p:spPr>
           <a:xfrm>
-            <a:off x="8055864" y="1600200"/>
-            <a:ext cx="3090672" cy="219456"/>
+            <a:off x="7827264" y="1600200"/>
+            <a:ext cx="3319272" cy="219456"/>
           </a:xfrm>
           <a:prstGeom prst="rect">
             <a:avLst/>
@@ -5649,11 +6090,11 @@
             <a:r>
               <a:rPr sz="1100" b="1">
                 <a:solidFill>
-                  <a:srgbClr val="2463A0"/>
-                </a:solidFill>
-                <a:latin typeface="Aptos"/>
-              </a:rPr>
-              <a:t>Why “save”?</a:t>
+                  <a:srgbClr val="24888E"/>
+                </a:solidFill>
+                <a:latin typeface="Aptos"/>
+              </a:rPr>
+              <a:t>Verification</a:t>
             </a:r>
           </a:p>
         </p:txBody>
@@ -5666,8 +6107,8 @@
         </p:nvSpPr>
         <p:spPr>
           <a:xfrm>
-            <a:off x="8055864" y="1865376"/>
-            <a:ext cx="3090672" cy="1380744"/>
+            <a:off x="7827264" y="1865376"/>
+            <a:ext cx="3319272" cy="1380744"/>
           </a:xfrm>
           <a:prstGeom prst="rect">
             <a:avLst/>
@@ -5688,67 +6129,21 @@
                 </a:solidFill>
                 <a:latin typeface="Aptos"/>
               </a:rPr>
-              <a:t>We save only the uncontaminated portion of each circular-convolution block and concatenate those portions.</a:t>
-            </a:r>
-          </a:p>
-        </p:txBody>
-      </p:sp>
-      <p:sp>
-        <p:nvSpPr>
-          <p:cNvPr id="11" name="Rounded Rectangle 10"/>
-          <p:cNvSpPr/>
-          <p:nvPr/>
-        </p:nvSpPr>
-        <p:spPr>
-          <a:xfrm>
-            <a:off x="7909560" y="3794759"/>
-            <a:ext cx="3383280" cy="1595947"/>
-          </a:xfrm>
-          <a:prstGeom prst="roundRect">
-            <a:avLst/>
-          </a:prstGeom>
-          <a:solidFill>
-            <a:srgbClr val="F1F5F9"/>
-          </a:solidFill>
-          <a:ln>
-            <a:solidFill>
-              <a:srgbClr val="D67D35"/>
-            </a:solidFill>
-          </a:ln>
-        </p:spPr>
-        <p:style>
-          <a:lnRef idx="1">
-            <a:schemeClr val="accent1"/>
-          </a:lnRef>
-          <a:fillRef idx="3">
-            <a:schemeClr val="accent1"/>
-          </a:fillRef>
-          <a:effectRef idx="2">
-            <a:schemeClr val="accent1"/>
-          </a:effectRef>
-          <a:fontRef idx="minor">
-            <a:schemeClr val="lt1"/>
-          </a:fontRef>
-        </p:style>
-        <p:txBody>
-          <a:bodyPr rtlCol="0" anchor="ctr"/>
-          <a:lstStyle/>
-          <a:p>
-            <a:pPr algn="ctr"/>
-            <a:endParaRPr/>
-          </a:p>
-        </p:txBody>
-      </p:sp>
-      <p:sp>
-        <p:nvSpPr>
-          <p:cNvPr id="12" name="TextBox 11"/>
-          <p:cNvSpPr txBox="1"/>
-          <p:nvPr/>
-        </p:nvSpPr>
-        <p:spPr>
-          <a:xfrm>
-            <a:off x="8055864" y="3886200"/>
-            <a:ext cx="3090672" cy="219456"/>
+              <a:t>The direct time-domain FIR and FFT overlap-add traces lie on top of one another to numerical precision.</a:t>
+            </a:r>
+          </a:p>
+        </p:txBody>
+      </p:sp>
+      <p:sp>
+        <p:nvSpPr>
+          <p:cNvPr id="11" name="TextBox 10"/>
+          <p:cNvSpPr txBox="1"/>
+          <p:nvPr/>
+        </p:nvSpPr>
+        <p:spPr>
+          <a:xfrm>
+            <a:off x="7726679" y="3840480"/>
+            <a:ext cx="3383280" cy="731520"/>
           </a:xfrm>
           <a:prstGeom prst="rect">
             <a:avLst/>
@@ -5763,48 +6158,13 @@
           <a:p>
             <a:pPr algn="l"/>
             <a:r>
-              <a:rPr sz="1100" b="1">
-                <a:solidFill>
-                  <a:srgbClr val="D67D35"/>
-                </a:solidFill>
-                <a:latin typeface="Aptos"/>
-              </a:rPr>
-              <a:t>Contrast</a:t>
-            </a:r>
-          </a:p>
-        </p:txBody>
-      </p:sp>
-      <p:sp>
-        <p:nvSpPr>
-          <p:cNvPr id="13" name="TextBox 12"/>
-          <p:cNvSpPr txBox="1"/>
-          <p:nvPr/>
-        </p:nvSpPr>
-        <p:spPr>
-          <a:xfrm>
-            <a:off x="8055864" y="4151376"/>
-            <a:ext cx="3090672" cy="923544"/>
-          </a:xfrm>
-          <a:prstGeom prst="rect">
-            <a:avLst/>
-          </a:prstGeom>
-          <a:noFill/>
-        </p:spPr>
-        <p:txBody>
-          <a:bodyPr wrap="square">
-            <a:spAutoFit/>
-          </a:bodyPr>
-          <a:lstStyle/>
-          <a:p>
-            <a:pPr algn="l"/>
-            <a:r>
-              <a:rPr sz="1700" b="0">
-                <a:solidFill>
-                  <a:srgbClr val="191E26"/>
-                </a:solidFill>
-                <a:latin typeface="Aptos"/>
-              </a:rPr>
-              <a:t>OLA overlaps and adds outputs. OLS overlaps inputs and discards corrupted outputs.</a:t>
+              <a:rPr sz="2000" b="1">
+                <a:solidFill>
+                  <a:srgbClr val="16253E"/>
+                </a:solidFill>
+                <a:latin typeface="Aptos"/>
+              </a:rPr>
+              <a:t>This equivalence should be a coding unit test.</a:t>
             </a:r>
           </a:p>
         </p:txBody>
@@ -5916,7 +6276,7 @@
                 </a:solidFill>
                 <a:latin typeface="Aptos"/>
               </a:rPr>
-              <a:t>OLA versus OLS: engineering trade-offs</a:t>
+              <a:t>Overlap-Save: overlap the input, discard invalid outputs</a:t>
             </a:r>
           </a:p>
         </p:txBody>
@@ -5951,7 +6311,7 @@
                 </a:solidFill>
                 <a:latin typeface="Aptos"/>
               </a:rPr>
-              <a:t>STREAMING</a:t>
+              <a:t>OVERLAP-SAVE</a:t>
             </a:r>
           </a:p>
         </p:txBody>
@@ -5986,7 +6346,7 @@
                 </a:solidFill>
                 <a:latin typeface="Aptos"/>
               </a:rPr>
-              <a:t>1:06–1:10</a:t>
+              <a:t>0:58–1:06</a:t>
             </a:r>
           </a:p>
         </p:txBody>
@@ -6034,43 +6394,8 @@
         </p:nvSpPr>
         <p:spPr>
           <a:xfrm>
-            <a:off x="822960" y="1325880"/>
-            <a:ext cx="2743200" cy="365760"/>
-          </a:xfrm>
-          <a:prstGeom prst="rect">
-            <a:avLst/>
-          </a:prstGeom>
-          <a:noFill/>
-        </p:spPr>
-        <p:txBody>
-          <a:bodyPr wrap="square">
-            <a:spAutoFit/>
-          </a:bodyPr>
-          <a:lstStyle/>
-          <a:p>
-            <a:pPr algn="l"/>
-            <a:r>
-              <a:rPr sz="2300" b="1">
-                <a:solidFill>
-                  <a:srgbClr val="2463A0"/>
-                </a:solidFill>
-                <a:latin typeface="Aptos"/>
-              </a:rPr>
-              <a:t>Overlap-Add</a:t>
-            </a:r>
-          </a:p>
-        </p:txBody>
-      </p:sp>
-      <p:sp>
-        <p:nvSpPr>
-          <p:cNvPr id="8" name="TextBox 7"/>
-          <p:cNvSpPr txBox="1"/>
-          <p:nvPr/>
-        </p:nvSpPr>
-        <p:spPr>
-          <a:xfrm>
-            <a:off x="822960" y="1828800"/>
-            <a:ext cx="4572000" cy="2103120"/>
+            <a:off x="731520" y="1280160"/>
+            <a:ext cx="6949440" cy="3383280"/>
           </a:xfrm>
           <a:prstGeom prst="rect">
             <a:avLst/>
@@ -6087,7 +6412,7 @@
               <a:spcAft>
                 <a:spcPts val="700"/>
               </a:spcAft>
-              <a:defRPr sz="1900">
+              <a:defRPr sz="2000">
                 <a:solidFill>
                   <a:srgbClr val="191E26"/>
                 </a:solidFill>
@@ -6095,7 +6420,7 @@
               </a:defRPr>
             </a:pPr>
             <a:r>
-              <a:t>• Simple conceptual decomposition.</a:t>
+              <a:t>• Choose an FFT size NFFT and FIR length Lh.</a:t>
             </a:r>
           </a:p>
           <a:p>
@@ -6103,7 +6428,7 @@
               <a:spcAft>
                 <a:spcPts val="700"/>
               </a:spcAft>
-              <a:defRPr sz="1900">
+              <a:defRPr sz="2000">
                 <a:solidFill>
                   <a:srgbClr val="191E26"/>
                 </a:solidFill>
@@ -6111,7 +6436,7 @@
               </a:defRPr>
             </a:pPr>
             <a:r>
-              <a:t>• Needs an output accumulation buffer.</a:t>
+              <a:t>• Each input block contains Lh − 1 old samples plus new samples.</a:t>
             </a:r>
           </a:p>
           <a:p>
@@ -6119,7 +6444,7 @@
               <a:spcAft>
                 <a:spcPts val="700"/>
               </a:spcAft>
-              <a:defRPr sz="1900">
+              <a:defRPr sz="2000">
                 <a:solidFill>
                   <a:srgbClr val="191E26"/>
                 </a:solidFill>
@@ -6127,73 +6452,15 @@
               </a:defRPr>
             </a:pPr>
             <a:r>
-              <a:t>• Input blocks are non-overlapping.</a:t>
-            </a:r>
-          </a:p>
-        </p:txBody>
-      </p:sp>
-      <p:sp>
-        <p:nvSpPr>
-          <p:cNvPr id="9" name="TextBox 8"/>
-          <p:cNvSpPr txBox="1"/>
-          <p:nvPr/>
-        </p:nvSpPr>
-        <p:spPr>
-          <a:xfrm>
-            <a:off x="6309360" y="1325880"/>
-            <a:ext cx="2743200" cy="365760"/>
-          </a:xfrm>
-          <a:prstGeom prst="rect">
-            <a:avLst/>
-          </a:prstGeom>
-          <a:noFill/>
-        </p:spPr>
-        <p:txBody>
-          <a:bodyPr wrap="square">
-            <a:spAutoFit/>
-          </a:bodyPr>
-          <a:lstStyle/>
-          <a:p>
-            <a:pPr algn="l"/>
-            <a:r>
-              <a:rPr sz="2300" b="1">
-                <a:solidFill>
-                  <a:srgbClr val="24888E"/>
-                </a:solidFill>
-                <a:latin typeface="Aptos"/>
-              </a:rPr>
-              <a:t>Overlap-Save</a:t>
-            </a:r>
-          </a:p>
-        </p:txBody>
-      </p:sp>
-      <p:sp>
-        <p:nvSpPr>
-          <p:cNvPr id="10" name="TextBox 9"/>
-          <p:cNvSpPr txBox="1"/>
-          <p:nvPr/>
-        </p:nvSpPr>
-        <p:spPr>
-          <a:xfrm>
-            <a:off x="6309360" y="1828800"/>
-            <a:ext cx="4572000" cy="2103120"/>
-          </a:xfrm>
-          <a:prstGeom prst="rect">
-            <a:avLst/>
-          </a:prstGeom>
-          <a:noFill/>
-        </p:spPr>
-        <p:txBody>
-          <a:bodyPr wrap="square">
-            <a:spAutoFit/>
-          </a:bodyPr>
-          <a:lstStyle/>
+              <a:t>• Perform NFFT-point circular convolution.</a:t>
+            </a:r>
+          </a:p>
           <a:p>
             <a:pPr>
               <a:spcAft>
                 <a:spcPts val="700"/>
               </a:spcAft>
-              <a:defRPr sz="1900">
+              <a:defRPr sz="2000">
                 <a:solidFill>
                   <a:srgbClr val="191E26"/>
                 </a:solidFill>
@@ -6201,7 +6468,7 @@
               </a:defRPr>
             </a:pPr>
             <a:r>
-              <a:t>• Input blocks overlap by Lh − 1.</a:t>
+              <a:t>• Discard the first Lh − 1 output samples, which contain time-aliasing contamination.</a:t>
             </a:r>
           </a:p>
           <a:p>
@@ -6209,7 +6476,7 @@
               <a:spcAft>
                 <a:spcPts val="700"/>
               </a:spcAft>
-              <a:defRPr sz="1900">
+              <a:defRPr sz="2000">
                 <a:solidFill>
                   <a:srgbClr val="191E26"/>
                 </a:solidFill>
@@ -6217,37 +6484,21 @@
               </a:defRPr>
             </a:pPr>
             <a:r>
-              <a:t>• No output addition step.</a:t>
-            </a:r>
-          </a:p>
-          <a:p>
-            <a:pPr>
-              <a:spcAft>
-                <a:spcPts val="700"/>
-              </a:spcAft>
-              <a:defRPr sz="1900">
-                <a:solidFill>
-                  <a:srgbClr val="191E26"/>
-                </a:solidFill>
-                <a:latin typeface="Aptos"/>
-              </a:defRPr>
-            </a:pPr>
-            <a:r>
-              <a:t>• Discard first Lh − 1 samples per block.</a:t>
-            </a:r>
-          </a:p>
-        </p:txBody>
-      </p:sp>
-      <p:sp>
-        <p:nvSpPr>
-          <p:cNvPr id="11" name="Rounded Rectangle 10"/>
+              <a:t>• Keep the remaining NFFT − Lh + 1 valid samples.</a:t>
+            </a:r>
+          </a:p>
+        </p:txBody>
+      </p:sp>
+      <p:sp>
+        <p:nvSpPr>
+          <p:cNvPr id="8" name="Rounded Rectangle 7"/>
           <p:cNvSpPr/>
           <p:nvPr/>
         </p:nvSpPr>
         <p:spPr>
           <a:xfrm>
-            <a:off x="1920240" y="4709159"/>
-            <a:ext cx="8229600" cy="1032421"/>
+            <a:off x="7909560" y="1508760"/>
+            <a:ext cx="3383280" cy="1828800"/>
           </a:xfrm>
           <a:prstGeom prst="roundRect">
             <a:avLst/>
@@ -6257,7 +6508,7 @@
           </a:solidFill>
           <a:ln>
             <a:solidFill>
-              <a:srgbClr val="24888E"/>
+              <a:srgbClr val="2463A0"/>
             </a:solidFill>
           </a:ln>
         </p:spPr>
@@ -6286,14 +6537,14 @@
       </p:sp>
       <p:sp>
         <p:nvSpPr>
-          <p:cNvPr id="12" name="TextBox 11"/>
-          <p:cNvSpPr txBox="1"/>
-          <p:nvPr/>
-        </p:nvSpPr>
-        <p:spPr>
-          <a:xfrm>
-            <a:off x="2066544" y="4800600"/>
-            <a:ext cx="7936992" cy="219456"/>
+          <p:cNvPr id="9" name="TextBox 8"/>
+          <p:cNvSpPr txBox="1"/>
+          <p:nvPr/>
+        </p:nvSpPr>
+        <p:spPr>
+          <a:xfrm>
+            <a:off x="8055864" y="1600200"/>
+            <a:ext cx="3090672" cy="219456"/>
           </a:xfrm>
           <a:prstGeom prst="rect">
             <a:avLst/>
@@ -6310,25 +6561,25 @@
             <a:r>
               <a:rPr sz="1100" b="1">
                 <a:solidFill>
-                  <a:srgbClr val="24888E"/>
-                </a:solidFill>
-                <a:latin typeface="Aptos"/>
-              </a:rPr>
-              <a:t>Both</a:t>
-            </a:r>
-          </a:p>
-        </p:txBody>
-      </p:sp>
-      <p:sp>
-        <p:nvSpPr>
-          <p:cNvPr id="13" name="TextBox 12"/>
-          <p:cNvSpPr txBox="1"/>
-          <p:nvPr/>
-        </p:nvSpPr>
-        <p:spPr>
-          <a:xfrm>
-            <a:off x="2066544" y="5065776"/>
-            <a:ext cx="7936992" cy="466344"/>
+                  <a:srgbClr val="2463A0"/>
+                </a:solidFill>
+                <a:latin typeface="Aptos"/>
+              </a:rPr>
+              <a:t>Why “save”?</a:t>
+            </a:r>
+          </a:p>
+        </p:txBody>
+      </p:sp>
+      <p:sp>
+        <p:nvSpPr>
+          <p:cNvPr id="10" name="TextBox 9"/>
+          <p:cNvSpPr txBox="1"/>
+          <p:nvPr/>
+        </p:nvSpPr>
+        <p:spPr>
+          <a:xfrm>
+            <a:off x="8055864" y="1865376"/>
+            <a:ext cx="3090672" cy="1380744"/>
           </a:xfrm>
           <a:prstGeom prst="rect">
             <a:avLst/>
@@ -6349,63 +6600,32 @@
                 </a:solidFill>
                 <a:latin typeface="Aptos"/>
               </a:rPr>
-              <a:t>Reuse H[k] for every block and can be much faster than direct convolution for long FIR filters.</a:t>
-            </a:r>
-          </a:p>
-        </p:txBody>
-      </p:sp>
-    </p:spTree>
-  </p:cSld>
-  <p:clrMapOvr>
-    <a:masterClrMapping/>
-  </p:clrMapOvr>
-</p:sld>
-</file>
-
-<file path=ppt/slides/slide17.xml><?xml version="1.0" encoding="utf-8"?>
-<p:sld xmlns:a="http://schemas.openxmlformats.org/drawingml/2006/main" xmlns:r="http://schemas.openxmlformats.org/officeDocument/2006/relationships" xmlns:p="http://schemas.openxmlformats.org/presentationml/2006/main">
-  <p:cSld>
-    <p:bg>
-      <p:bgPr>
-        <a:solidFill>
-          <a:srgbClr val="FFFFFF"/>
-        </a:solidFill>
-        <a:effectLst/>
-      </p:bgPr>
-    </p:bg>
-    <p:spTree>
-      <p:nvGrpSpPr>
-        <p:cNvPr id="1" name=""/>
-        <p:cNvGrpSpPr/>
-        <p:nvPr/>
-      </p:nvGrpSpPr>
-      <p:grpSpPr>
-        <a:xfrm>
-          <a:off x="0" y="0"/>
-          <a:ext cx="0" cy="0"/>
-          <a:chOff x="0" y="0"/>
-          <a:chExt cx="0" cy="0"/>
-        </a:xfrm>
-      </p:grpSpPr>
-      <p:sp>
-        <p:nvSpPr>
-          <p:cNvPr id="2" name="Rectangle 1"/>
+              <a:t>We save only the uncontaminated portion of each circular-convolution block and concatenate those portions.</a:t>
+            </a:r>
+          </a:p>
+        </p:txBody>
+      </p:sp>
+      <p:sp>
+        <p:nvSpPr>
+          <p:cNvPr id="11" name="Rounded Rectangle 10"/>
           <p:cNvSpPr/>
           <p:nvPr/>
         </p:nvSpPr>
         <p:spPr>
           <a:xfrm>
-            <a:off x="0" y="0"/>
-            <a:ext cx="12191695" cy="164592"/>
-          </a:xfrm>
-          <a:prstGeom prst="rect">
+            <a:off x="7909560" y="3794759"/>
+            <a:ext cx="3383280" cy="1595947"/>
+          </a:xfrm>
+          <a:prstGeom prst="roundRect">
             <a:avLst/>
           </a:prstGeom>
           <a:solidFill>
-            <a:srgbClr val="24888E"/>
+            <a:srgbClr val="F1F5F9"/>
           </a:solidFill>
           <a:ln>
-            <a:noFill/>
+            <a:solidFill>
+              <a:srgbClr val="D67D35"/>
+            </a:solidFill>
           </a:ln>
         </p:spPr>
         <p:style>
@@ -6433,14 +6653,14 @@
       </p:sp>
       <p:sp>
         <p:nvSpPr>
-          <p:cNvPr id="3" name="TextBox 2"/>
-          <p:cNvSpPr txBox="1"/>
-          <p:nvPr/>
-        </p:nvSpPr>
-        <p:spPr>
-          <a:xfrm>
-            <a:off x="502920" y="320040"/>
-            <a:ext cx="10972800" cy="502920"/>
+          <p:cNvPr id="12" name="TextBox 11"/>
+          <p:cNvSpPr txBox="1"/>
+          <p:nvPr/>
+        </p:nvSpPr>
+        <p:spPr>
+          <a:xfrm>
+            <a:off x="8055864" y="3886200"/>
+            <a:ext cx="3090672" cy="219456"/>
           </a:xfrm>
           <a:prstGeom prst="rect">
             <a:avLst/>
@@ -6455,27 +6675,27 @@
           <a:p>
             <a:pPr algn="l"/>
             <a:r>
-              <a:rPr sz="2900" b="1">
-                <a:solidFill>
-                  <a:srgbClr val="16253E"/>
-                </a:solidFill>
-                <a:latin typeface="Aptos"/>
-              </a:rPr>
-              <a:t>Choosing FFT and block sizes</a:t>
-            </a:r>
-          </a:p>
-        </p:txBody>
-      </p:sp>
-      <p:sp>
-        <p:nvSpPr>
-          <p:cNvPr id="4" name="TextBox 3"/>
-          <p:cNvSpPr txBox="1"/>
-          <p:nvPr/>
-        </p:nvSpPr>
-        <p:spPr>
-          <a:xfrm>
-            <a:off x="530352" y="877824"/>
-            <a:ext cx="7315200" cy="256032"/>
+              <a:rPr sz="1100" b="1">
+                <a:solidFill>
+                  <a:srgbClr val="D67D35"/>
+                </a:solidFill>
+                <a:latin typeface="Aptos"/>
+              </a:rPr>
+              <a:t>Contrast</a:t>
+            </a:r>
+          </a:p>
+        </p:txBody>
+      </p:sp>
+      <p:sp>
+        <p:nvSpPr>
+          <p:cNvPr id="13" name="TextBox 12"/>
+          <p:cNvSpPr txBox="1"/>
+          <p:nvPr/>
+        </p:nvSpPr>
+        <p:spPr>
+          <a:xfrm>
+            <a:off x="8055864" y="4151376"/>
+            <a:ext cx="3090672" cy="923544"/>
           </a:xfrm>
           <a:prstGeom prst="rect">
             <a:avLst/>
@@ -6490,291 +6710,1234 @@
           <a:p>
             <a:pPr algn="l"/>
             <a:r>
-              <a:rPr sz="1100" b="1">
-                <a:solidFill>
-                  <a:srgbClr val="24888E"/>
-                </a:solidFill>
-                <a:latin typeface="Aptos"/>
-              </a:rPr>
-              <a:t>STREAMING</a:t>
-            </a:r>
-          </a:p>
-        </p:txBody>
-      </p:sp>
-      <p:sp>
-        <p:nvSpPr>
-          <p:cNvPr id="5" name="TextBox 4"/>
-          <p:cNvSpPr txBox="1"/>
-          <p:nvPr/>
-        </p:nvSpPr>
-        <p:spPr>
-          <a:xfrm>
-            <a:off x="10241280" y="877824"/>
-            <a:ext cx="1463040" cy="256032"/>
-          </a:xfrm>
-          <a:prstGeom prst="rect">
-            <a:avLst/>
-          </a:prstGeom>
-          <a:noFill/>
-        </p:spPr>
-        <p:txBody>
-          <a:bodyPr wrap="square">
-            <a:spAutoFit/>
-          </a:bodyPr>
-          <a:lstStyle/>
-          <a:p>
-            <a:pPr algn="r"/>
-            <a:r>
-              <a:rPr sz="1100" b="0">
-                <a:solidFill>
-                  <a:srgbClr val="5A6676"/>
-                </a:solidFill>
-                <a:latin typeface="Aptos"/>
-              </a:rPr>
-              <a:t>1:10–1:13</a:t>
-            </a:r>
-          </a:p>
-        </p:txBody>
-      </p:sp>
-      <p:sp>
-        <p:nvSpPr>
-          <p:cNvPr id="6" name="TextBox 5"/>
-          <p:cNvSpPr txBox="1"/>
-          <p:nvPr/>
-        </p:nvSpPr>
-        <p:spPr>
-          <a:xfrm>
-            <a:off x="530352" y="6519672"/>
-            <a:ext cx="3931920" cy="182880"/>
-          </a:xfrm>
-          <a:prstGeom prst="rect">
-            <a:avLst/>
-          </a:prstGeom>
-          <a:noFill/>
-        </p:spPr>
-        <p:txBody>
-          <a:bodyPr wrap="square">
-            <a:spAutoFit/>
-          </a:bodyPr>
-          <a:lstStyle/>
-          <a:p>
-            <a:pPr algn="l"/>
-            <a:r>
-              <a:rPr sz="900" b="1">
-                <a:solidFill>
-                  <a:srgbClr val="5A6676"/>
-                </a:solidFill>
-                <a:latin typeface="Aptos"/>
-              </a:rPr>
-              <a:t>WEEK 10 • TIME-FREQUENCY ANALYSIS</a:t>
-            </a:r>
-          </a:p>
-        </p:txBody>
-      </p:sp>
-      <p:sp>
-        <p:nvSpPr>
-          <p:cNvPr id="7" name="TextBox 6"/>
-          <p:cNvSpPr txBox="1"/>
-          <p:nvPr/>
-        </p:nvSpPr>
-        <p:spPr>
-          <a:xfrm>
-            <a:off x="731520" y="1325880"/>
-            <a:ext cx="6675120" cy="3108960"/>
-          </a:xfrm>
-          <a:prstGeom prst="rect">
-            <a:avLst/>
-          </a:prstGeom>
-          <a:noFill/>
-        </p:spPr>
-        <p:txBody>
-          <a:bodyPr wrap="square">
-            <a:spAutoFit/>
-          </a:bodyPr>
-          <a:lstStyle/>
-          <a:p>
-            <a:pPr>
-              <a:spcAft>
-                <a:spcPts val="700"/>
-              </a:spcAft>
-              <a:defRPr sz="2000">
+              <a:rPr sz="1700" b="0">
                 <a:solidFill>
                   <a:srgbClr val="191E26"/>
                 </a:solidFill>
                 <a:latin typeface="Aptos"/>
-              </a:defRPr>
-            </a:pPr>
-            <a:r>
-              <a:t>• Larger FFTs often improve arithmetic efficiency per sample but increase buffering latency.</a:t>
-            </a:r>
-          </a:p>
-          <a:p>
-            <a:pPr>
-              <a:spcAft>
-                <a:spcPts val="700"/>
-              </a:spcAft>
-              <a:defRPr sz="2000">
-                <a:solidFill>
-                  <a:srgbClr val="191E26"/>
-                </a:solidFill>
-                <a:latin typeface="Aptos"/>
-              </a:defRPr>
-            </a:pPr>
-            <a:r>
-              <a:t>• Short blocks reduce latency but increase FFT overhead.</a:t>
-            </a:r>
-          </a:p>
-          <a:p>
-            <a:pPr>
-              <a:spcAft>
-                <a:spcPts val="700"/>
-              </a:spcAft>
-              <a:defRPr sz="2000">
-                <a:solidFill>
-                  <a:srgbClr val="191E26"/>
-                </a:solidFill>
-                <a:latin typeface="Aptos"/>
-              </a:defRPr>
-            </a:pPr>
-            <a:r>
-              <a:t>• Choose NFFT using measured platform performance, not only asymptotic complexity.</a:t>
-            </a:r>
-          </a:p>
-          <a:p>
-            <a:pPr>
-              <a:spcAft>
-                <a:spcPts val="700"/>
-              </a:spcAft>
-              <a:defRPr sz="2000">
-                <a:solidFill>
-                  <a:srgbClr val="191E26"/>
-                </a:solidFill>
-                <a:latin typeface="Aptos"/>
-              </a:defRPr>
-            </a:pPr>
-            <a:r>
-              <a:t>• On an edge device, memory movement and cache behavior can matter as much as multiply counts.</a:t>
-            </a:r>
-          </a:p>
-        </p:txBody>
-      </p:sp>
-      <p:sp>
-        <p:nvSpPr>
-          <p:cNvPr id="8" name="Rounded Rectangle 7"/>
-          <p:cNvSpPr/>
-          <p:nvPr/>
-        </p:nvSpPr>
-        <p:spPr>
-          <a:xfrm>
-            <a:off x="7680960" y="1554480"/>
-            <a:ext cx="3657600" cy="2148840"/>
-          </a:xfrm>
-          <a:prstGeom prst="roundRect">
-            <a:avLst/>
-          </a:prstGeom>
-          <a:solidFill>
-            <a:srgbClr val="F1F5F9"/>
-          </a:solidFill>
-          <a:ln>
+              </a:rPr>
+              <a:t>OLA overlaps and adds outputs. OLS overlaps inputs and discards corrupted outputs.</a:t>
+            </a:r>
+          </a:p>
+        </p:txBody>
+      </p:sp>
+    </p:spTree>
+  </p:cSld>
+  <p:clrMapOvr>
+    <a:masterClrMapping/>
+  </p:clrMapOvr>
+</p:sld>
+</file>
+
+<file path=ppt/slides/slide17.xml><?xml version="1.0" encoding="utf-8"?>
+<p:sld xmlns:a="http://schemas.openxmlformats.org/drawingml/2006/main" xmlns:r="http://schemas.openxmlformats.org/officeDocument/2006/relationships" xmlns:p="http://schemas.openxmlformats.org/presentationml/2006/main">
+  <p:cSld>
+    <p:spTree>
+      <p:nvGrpSpPr>
+        <p:cNvPr id="1" name="">
+          <a:extLst>
+            <a:ext uri="{FF2B5EF4-FFF2-40B4-BE49-F238E27FC236}">
+              <a16:creationId xmlns:a16="http://schemas.microsoft.com/office/drawing/2014/main" id="{EEFFFFBA-4DC8-7BEB-689C-21A1C880844E}"/>
+            </a:ext>
+          </a:extLst>
+        </p:cNvPr>
+        <p:cNvGrpSpPr/>
+        <p:nvPr/>
+      </p:nvGrpSpPr>
+      <p:grpSpPr>
+        <a:xfrm>
+          <a:off x="0" y="0"/>
+          <a:ext cx="0" cy="0"/>
+          <a:chOff x="0" y="0"/>
+          <a:chExt cx="0" cy="0"/>
+        </a:xfrm>
+      </p:grpSpPr>
+      <p:grpSp>
+        <p:nvGrpSpPr>
+          <p:cNvPr id="9" name="Group 8">
+            <a:extLst>
+              <a:ext uri="{FF2B5EF4-FFF2-40B4-BE49-F238E27FC236}">
+                <a16:creationId xmlns:a16="http://schemas.microsoft.com/office/drawing/2014/main" id="{D14C61BD-606D-D278-5D28-D27CE5AD9B16}"/>
+              </a:ext>
+            </a:extLst>
+          </p:cNvPr>
+          <p:cNvGrpSpPr/>
+          <p:nvPr/>
+        </p:nvGrpSpPr>
+        <p:grpSpPr>
+          <a:xfrm>
+            <a:off x="646611" y="3359888"/>
+            <a:ext cx="7834367" cy="676535"/>
+            <a:chOff x="646611" y="3359888"/>
+            <a:chExt cx="7834367" cy="676535"/>
+          </a:xfrm>
+        </p:grpSpPr>
+        <p:sp>
+          <p:nvSpPr>
+            <p:cNvPr id="8" name="Rectangle 7">
+              <a:extLst>
+                <a:ext uri="{FF2B5EF4-FFF2-40B4-BE49-F238E27FC236}">
+                  <a16:creationId xmlns:a16="http://schemas.microsoft.com/office/drawing/2014/main" id="{F1A6C055-0060-0C36-BC55-D2FA77CA6255}"/>
+                </a:ext>
+              </a:extLst>
+            </p:cNvPr>
+            <p:cNvSpPr/>
+            <p:nvPr/>
+          </p:nvSpPr>
+          <p:spPr>
+            <a:xfrm>
+              <a:off x="646611" y="3840480"/>
+              <a:ext cx="666206" cy="195943"/>
+            </a:xfrm>
+            <a:prstGeom prst="rect">
+              <a:avLst/>
+            </a:prstGeom>
             <a:solidFill>
-              <a:srgbClr val="D67D35"/>
+              <a:srgbClr val="FFFF00"/>
             </a:solidFill>
-          </a:ln>
-        </p:spPr>
-        <p:style>
-          <a:lnRef idx="1">
-            <a:schemeClr val="accent1"/>
-          </a:lnRef>
-          <a:fillRef idx="3">
-            <a:schemeClr val="accent1"/>
-          </a:fillRef>
-          <a:effectRef idx="2">
-            <a:schemeClr val="accent1"/>
-          </a:effectRef>
-          <a:fontRef idx="minor">
-            <a:schemeClr val="lt1"/>
-          </a:fontRef>
-        </p:style>
-        <p:txBody>
-          <a:bodyPr rtlCol="0" anchor="ctr"/>
-          <a:lstStyle/>
-          <a:p>
-            <a:pPr algn="ctr"/>
-            <a:endParaRPr/>
-          </a:p>
-        </p:txBody>
-      </p:sp>
-      <p:sp>
-        <p:nvSpPr>
-          <p:cNvPr id="9" name="TextBox 8"/>
-          <p:cNvSpPr txBox="1"/>
-          <p:nvPr/>
-        </p:nvSpPr>
-        <p:spPr>
-          <a:xfrm>
-            <a:off x="7827264" y="1645920"/>
-            <a:ext cx="3364992" cy="219456"/>
-          </a:xfrm>
-          <a:prstGeom prst="rect">
-            <a:avLst/>
-          </a:prstGeom>
-          <a:noFill/>
-        </p:spPr>
-        <p:txBody>
-          <a:bodyPr wrap="square">
-            <a:spAutoFit/>
-          </a:bodyPr>
-          <a:lstStyle/>
-          <a:p>
-            <a:pPr algn="l"/>
-            <a:r>
-              <a:rPr sz="1100" b="1">
-                <a:solidFill>
-                  <a:srgbClr val="D67D35"/>
-                </a:solidFill>
-                <a:latin typeface="Aptos"/>
-              </a:rPr>
-              <a:t>Design question</a:t>
-            </a:r>
-          </a:p>
-        </p:txBody>
-      </p:sp>
-      <p:sp>
-        <p:nvSpPr>
-          <p:cNvPr id="10" name="TextBox 9"/>
-          <p:cNvSpPr txBox="1"/>
-          <p:nvPr/>
-        </p:nvSpPr>
-        <p:spPr>
-          <a:xfrm>
-            <a:off x="7827264" y="1911095"/>
-            <a:ext cx="3364992" cy="1700784"/>
-          </a:xfrm>
-          <a:prstGeom prst="rect">
-            <a:avLst/>
-          </a:prstGeom>
-          <a:noFill/>
-        </p:spPr>
-        <p:txBody>
-          <a:bodyPr wrap="square">
-            <a:spAutoFit/>
-          </a:bodyPr>
-          <a:lstStyle/>
-          <a:p>
-            <a:pPr algn="l"/>
-            <a:r>
-              <a:rPr sz="1700" b="0">
-                <a:solidFill>
-                  <a:srgbClr val="191E26"/>
-                </a:solidFill>
-                <a:latin typeface="Aptos"/>
-              </a:rPr>
-              <a:t>A classifier needs 10-ms latency. Would a huge “efficient” FFT block still be acceptable? No—the end-to-end latency constraint dominates.</a:t>
-            </a:r>
-          </a:p>
-        </p:txBody>
-      </p:sp>
+          </p:spPr>
+          <p:style>
+            <a:lnRef idx="1">
+              <a:schemeClr val="accent1"/>
+            </a:lnRef>
+            <a:fillRef idx="3">
+              <a:schemeClr val="accent1"/>
+            </a:fillRef>
+            <a:effectRef idx="2">
+              <a:schemeClr val="accent1"/>
+            </a:effectRef>
+            <a:fontRef idx="minor">
+              <a:schemeClr val="lt1"/>
+            </a:fontRef>
+          </p:style>
+          <p:txBody>
+            <a:bodyPr rtlCol="0" anchor="ctr"/>
+            <a:lstStyle/>
+            <a:p>
+              <a:pPr algn="ctr"/>
+              <a:endParaRPr lang="en-US"/>
+            </a:p>
+          </p:txBody>
+        </p:sp>
+        <p:sp>
+          <p:nvSpPr>
+            <p:cNvPr id="7" name="Rectangle 6">
+              <a:extLst>
+                <a:ext uri="{FF2B5EF4-FFF2-40B4-BE49-F238E27FC236}">
+                  <a16:creationId xmlns:a16="http://schemas.microsoft.com/office/drawing/2014/main" id="{869E480A-B898-2AE2-8E26-0C153519CE36}"/>
+                </a:ext>
+              </a:extLst>
+            </p:cNvPr>
+            <p:cNvSpPr/>
+            <p:nvPr/>
+          </p:nvSpPr>
+          <p:spPr>
+            <a:xfrm>
+              <a:off x="7641771" y="3359888"/>
+              <a:ext cx="839207" cy="186070"/>
+            </a:xfrm>
+            <a:prstGeom prst="rect">
+              <a:avLst/>
+            </a:prstGeom>
+            <a:solidFill>
+              <a:srgbClr val="FFFF00"/>
+            </a:solidFill>
+          </p:spPr>
+          <p:style>
+            <a:lnRef idx="1">
+              <a:schemeClr val="accent1"/>
+            </a:lnRef>
+            <a:fillRef idx="3">
+              <a:schemeClr val="accent1"/>
+            </a:fillRef>
+            <a:effectRef idx="2">
+              <a:schemeClr val="accent1"/>
+            </a:effectRef>
+            <a:fontRef idx="minor">
+              <a:schemeClr val="lt1"/>
+            </a:fontRef>
+          </p:style>
+          <p:txBody>
+            <a:bodyPr rtlCol="0" anchor="ctr"/>
+            <a:lstStyle/>
+            <a:p>
+              <a:pPr algn="ctr"/>
+              <a:endParaRPr lang="en-US"/>
+            </a:p>
+          </p:txBody>
+        </p:sp>
+        <p:sp>
+          <p:nvSpPr>
+            <p:cNvPr id="6" name="Rectangle 5">
+              <a:extLst>
+                <a:ext uri="{FF2B5EF4-FFF2-40B4-BE49-F238E27FC236}">
+                  <a16:creationId xmlns:a16="http://schemas.microsoft.com/office/drawing/2014/main" id="{708CA008-5F1C-9117-5929-0DE91CB14C44}"/>
+                </a:ext>
+              </a:extLst>
+            </p:cNvPr>
+            <p:cNvSpPr/>
+            <p:nvPr/>
+          </p:nvSpPr>
+          <p:spPr>
+            <a:xfrm>
+              <a:off x="4180114" y="3359888"/>
+              <a:ext cx="839207" cy="186070"/>
+            </a:xfrm>
+            <a:prstGeom prst="rect">
+              <a:avLst/>
+            </a:prstGeom>
+            <a:solidFill>
+              <a:srgbClr val="FFFF00"/>
+            </a:solidFill>
+          </p:spPr>
+          <p:style>
+            <a:lnRef idx="1">
+              <a:schemeClr val="accent1"/>
+            </a:lnRef>
+            <a:fillRef idx="3">
+              <a:schemeClr val="accent1"/>
+            </a:fillRef>
+            <a:effectRef idx="2">
+              <a:schemeClr val="accent1"/>
+            </a:effectRef>
+            <a:fontRef idx="minor">
+              <a:schemeClr val="lt1"/>
+            </a:fontRef>
+          </p:style>
+          <p:txBody>
+            <a:bodyPr rtlCol="0" anchor="ctr"/>
+            <a:lstStyle/>
+            <a:p>
+              <a:pPr algn="ctr"/>
+              <a:endParaRPr lang="en-US"/>
+            </a:p>
+          </p:txBody>
+        </p:sp>
+        <p:sp>
+          <p:nvSpPr>
+            <p:cNvPr id="5" name="Rectangle 4">
+              <a:extLst>
+                <a:ext uri="{FF2B5EF4-FFF2-40B4-BE49-F238E27FC236}">
+                  <a16:creationId xmlns:a16="http://schemas.microsoft.com/office/drawing/2014/main" id="{AEEB207B-6D3C-AA60-36FC-57F9A8A6C385}"/>
+                </a:ext>
+              </a:extLst>
+            </p:cNvPr>
+            <p:cNvSpPr/>
+            <p:nvPr/>
+          </p:nvSpPr>
+          <p:spPr>
+            <a:xfrm>
+              <a:off x="1414130" y="3359888"/>
+              <a:ext cx="563526" cy="186070"/>
+            </a:xfrm>
+            <a:prstGeom prst="rect">
+              <a:avLst/>
+            </a:prstGeom>
+            <a:solidFill>
+              <a:srgbClr val="FFFF00"/>
+            </a:solidFill>
+          </p:spPr>
+          <p:style>
+            <a:lnRef idx="1">
+              <a:schemeClr val="accent1"/>
+            </a:lnRef>
+            <a:fillRef idx="3">
+              <a:schemeClr val="accent1"/>
+            </a:fillRef>
+            <a:effectRef idx="2">
+              <a:schemeClr val="accent1"/>
+            </a:effectRef>
+            <a:fontRef idx="minor">
+              <a:schemeClr val="lt1"/>
+            </a:fontRef>
+          </p:style>
+          <p:txBody>
+            <a:bodyPr rtlCol="0" anchor="ctr"/>
+            <a:lstStyle/>
+            <a:p>
+              <a:pPr algn="ctr"/>
+              <a:endParaRPr lang="en-US"/>
+            </a:p>
+          </p:txBody>
+        </p:sp>
+      </p:grpSp>
+      <p:sp>
+        <p:nvSpPr>
+          <p:cNvPr id="2" name="TextBox 1">
+            <a:extLst>
+              <a:ext uri="{FF2B5EF4-FFF2-40B4-BE49-F238E27FC236}">
+                <a16:creationId xmlns:a16="http://schemas.microsoft.com/office/drawing/2014/main" id="{CA528382-B0DA-12F8-2E31-676D8737E392}"/>
+              </a:ext>
+            </a:extLst>
+          </p:cNvPr>
+          <p:cNvSpPr txBox="1"/>
+          <p:nvPr/>
+        </p:nvSpPr>
+        <p:spPr>
+          <a:xfrm>
+            <a:off x="600740" y="441251"/>
+            <a:ext cx="8012386" cy="523220"/>
+          </a:xfrm>
+          <a:prstGeom prst="rect">
+            <a:avLst/>
+          </a:prstGeom>
+          <a:noFill/>
+        </p:spPr>
+        <p:txBody>
+          <a:bodyPr wrap="none" rtlCol="0">
+            <a:spAutoFit/>
+          </a:bodyPr>
+          <a:lstStyle/>
+          <a:p>
+            <a:r>
+              <a:rPr lang="en-US" sz="2800" b="1" dirty="0"/>
+              <a:t>Overlap-Save Example </a:t>
+            </a:r>
+            <a:r>
+              <a:rPr lang="en-US" dirty="0"/>
+              <a:t>     B=3,  </a:t>
+            </a:r>
+            <a:r>
+              <a:rPr lang="en-US" dirty="0" err="1"/>
+              <a:t>Lh</a:t>
+            </a:r>
+            <a:r>
+              <a:rPr lang="en-US" dirty="0"/>
+              <a:t>=2,  NFFT=B+Lh-1=4,     h[n]=[h0, h1]</a:t>
+            </a:r>
+          </a:p>
+        </p:txBody>
+      </p:sp>
+      <p:sp>
+        <p:nvSpPr>
+          <p:cNvPr id="3" name="TextBox 2">
+            <a:extLst>
+              <a:ext uri="{FF2B5EF4-FFF2-40B4-BE49-F238E27FC236}">
+                <a16:creationId xmlns:a16="http://schemas.microsoft.com/office/drawing/2014/main" id="{6390239D-8ED1-7132-23E1-701422C72E8A}"/>
+              </a:ext>
+            </a:extLst>
+          </p:cNvPr>
+          <p:cNvSpPr txBox="1"/>
+          <p:nvPr/>
+        </p:nvSpPr>
+        <p:spPr>
+          <a:xfrm>
+            <a:off x="600740" y="1308341"/>
+            <a:ext cx="11137604" cy="3308598"/>
+          </a:xfrm>
+          <a:prstGeom prst="rect">
+            <a:avLst/>
+          </a:prstGeom>
+          <a:noFill/>
+        </p:spPr>
+        <p:txBody>
+          <a:bodyPr wrap="square" rtlCol="0">
+            <a:spAutoFit/>
+          </a:bodyPr>
+          <a:lstStyle/>
+          <a:p>
+            <a:r>
+              <a:rPr lang="en-US" sz="1100" dirty="0">
+                <a:latin typeface="Aptos Mono" panose="020B0009020202020204" pitchFamily="49" charset="0"/>
+              </a:rPr>
+              <a:t>                            </a:t>
+            </a:r>
+            <a:r>
+              <a:rPr lang="en-US" sz="1100" dirty="0">
+                <a:solidFill>
+                  <a:srgbClr val="0070C0"/>
+                </a:solidFill>
+                <a:latin typeface="Aptos Mono" panose="020B0009020202020204" pitchFamily="49" charset="0"/>
+              </a:rPr>
+              <a:t>x2</a:t>
+            </a:r>
+            <a:r>
+              <a:rPr lang="en-US" sz="1100" dirty="0">
+                <a:latin typeface="Aptos Mono" panose="020B0009020202020204" pitchFamily="49" charset="0"/>
+              </a:rPr>
+              <a:t> overlap                           </a:t>
+            </a:r>
+            <a:r>
+              <a:rPr lang="en-US" sz="1100" dirty="0">
+                <a:solidFill>
+                  <a:srgbClr val="00B050"/>
+                </a:solidFill>
+                <a:latin typeface="Aptos Mono" panose="020B0009020202020204" pitchFamily="49" charset="0"/>
+              </a:rPr>
+              <a:t>x5</a:t>
+            </a:r>
+            <a:r>
+              <a:rPr lang="en-US" sz="1100" dirty="0">
+                <a:latin typeface="Aptos Mono" panose="020B0009020202020204" pitchFamily="49" charset="0"/>
+              </a:rPr>
+              <a:t> overlap</a:t>
+            </a:r>
+          </a:p>
+          <a:p>
+            <a:r>
+              <a:rPr lang="en-US" sz="1100" dirty="0">
+                <a:latin typeface="Aptos Mono" panose="020B0009020202020204" pitchFamily="49" charset="0"/>
+              </a:rPr>
+              <a:t>x[n]-&gt;   0   </a:t>
+            </a:r>
+            <a:r>
+              <a:rPr lang="en-US" sz="1100" dirty="0">
+                <a:solidFill>
+                  <a:srgbClr val="0070C0"/>
+                </a:solidFill>
+                <a:latin typeface="Aptos Mono" panose="020B0009020202020204" pitchFamily="49" charset="0"/>
+              </a:rPr>
+              <a:t>x0   x1   </a:t>
+            </a:r>
+            <a:r>
+              <a:rPr lang="en-US" sz="1100" b="1" dirty="0">
+                <a:solidFill>
+                  <a:srgbClr val="0070C0"/>
+                </a:solidFill>
+                <a:latin typeface="Aptos Mono" panose="020B0009020202020204" pitchFamily="49" charset="0"/>
+              </a:rPr>
+              <a:t>x2</a:t>
+            </a:r>
+            <a:r>
+              <a:rPr lang="en-US" sz="1100" dirty="0">
+                <a:latin typeface="Aptos Mono" panose="020B0009020202020204" pitchFamily="49" charset="0"/>
+              </a:rPr>
+              <a:t>                 </a:t>
+            </a:r>
+            <a:r>
+              <a:rPr lang="en-US" sz="1100" b="1" dirty="0" err="1">
+                <a:solidFill>
+                  <a:srgbClr val="0070C0"/>
+                </a:solidFill>
+                <a:latin typeface="Aptos Mono" panose="020B0009020202020204" pitchFamily="49" charset="0"/>
+              </a:rPr>
+              <a:t>x2</a:t>
+            </a:r>
+            <a:r>
+              <a:rPr lang="en-US" sz="1100" dirty="0">
+                <a:latin typeface="Aptos Mono" panose="020B0009020202020204" pitchFamily="49" charset="0"/>
+              </a:rPr>
+              <a:t>   </a:t>
+            </a:r>
+            <a:r>
+              <a:rPr lang="en-US" sz="1100" dirty="0">
+                <a:solidFill>
+                  <a:srgbClr val="00B050"/>
+                </a:solidFill>
+                <a:latin typeface="Aptos Mono" panose="020B0009020202020204" pitchFamily="49" charset="0"/>
+              </a:rPr>
+              <a:t>x3   x4   </a:t>
+            </a:r>
+            <a:r>
+              <a:rPr lang="en-US" sz="1100" b="1" dirty="0">
+                <a:solidFill>
+                  <a:srgbClr val="00B050"/>
+                </a:solidFill>
+                <a:latin typeface="Aptos Mono" panose="020B0009020202020204" pitchFamily="49" charset="0"/>
+              </a:rPr>
+              <a:t>x5</a:t>
+            </a:r>
+            <a:r>
+              <a:rPr lang="en-US" sz="1100" dirty="0">
+                <a:latin typeface="Aptos Mono" panose="020B0009020202020204" pitchFamily="49" charset="0"/>
+              </a:rPr>
+              <a:t>                        </a:t>
+            </a:r>
+            <a:r>
+              <a:rPr lang="en-US" sz="1100" b="1" dirty="0" err="1">
+                <a:solidFill>
+                  <a:srgbClr val="00B050"/>
+                </a:solidFill>
+                <a:latin typeface="Aptos Mono" panose="020B0009020202020204" pitchFamily="49" charset="0"/>
+              </a:rPr>
+              <a:t>x5</a:t>
+            </a:r>
+            <a:r>
+              <a:rPr lang="en-US" sz="1100" dirty="0">
+                <a:latin typeface="Aptos Mono" panose="020B0009020202020204" pitchFamily="49" charset="0"/>
+              </a:rPr>
+              <a:t>   </a:t>
+            </a:r>
+            <a:r>
+              <a:rPr lang="en-US" sz="1100" dirty="0">
+                <a:solidFill>
+                  <a:srgbClr val="7030A0"/>
+                </a:solidFill>
+                <a:latin typeface="Aptos Mono" panose="020B0009020202020204" pitchFamily="49" charset="0"/>
+              </a:rPr>
+              <a:t>x6   x7   x8</a:t>
+            </a:r>
+          </a:p>
+          <a:p>
+            <a:endParaRPr lang="en-US" sz="1100" dirty="0">
+              <a:latin typeface="Aptos Mono" panose="020B0009020202020204" pitchFamily="49" charset="0"/>
+            </a:endParaRPr>
+          </a:p>
+          <a:p>
+            <a:r>
+              <a:rPr lang="en-US" sz="1100" dirty="0">
+                <a:latin typeface="Aptos Mono" panose="020B0009020202020204" pitchFamily="49" charset="0"/>
+              </a:rPr>
+              <a:t>         *h[n]                            *h[n]                                    *h[n] </a:t>
+            </a:r>
+          </a:p>
+          <a:p>
+            <a:endParaRPr lang="en-US" sz="1100" dirty="0">
+              <a:latin typeface="Aptos Mono" panose="020B0009020202020204" pitchFamily="49" charset="0"/>
+            </a:endParaRPr>
+          </a:p>
+          <a:p>
+            <a:r>
+              <a:rPr lang="en-US" sz="1100" dirty="0">
+                <a:latin typeface="Aptos Mono" panose="020B0009020202020204" pitchFamily="49" charset="0"/>
+              </a:rPr>
+              <a:t>         0h0</a:t>
+            </a:r>
+            <a:r>
+              <a:rPr lang="en-US" sz="1100" dirty="0">
+                <a:solidFill>
+                  <a:srgbClr val="0070C0"/>
+                </a:solidFill>
+                <a:latin typeface="Aptos Mono" panose="020B0009020202020204" pitchFamily="49" charset="0"/>
+              </a:rPr>
+              <a:t> 0h1</a:t>
+            </a:r>
+            <a:r>
+              <a:rPr lang="en-US" sz="1100" dirty="0">
+                <a:latin typeface="Aptos Mono" panose="020B0009020202020204" pitchFamily="49" charset="0"/>
+              </a:rPr>
+              <a:t>                          x2h0</a:t>
+            </a:r>
+            <a:r>
+              <a:rPr lang="en-US" sz="1100" dirty="0">
+                <a:solidFill>
+                  <a:srgbClr val="00B050"/>
+                </a:solidFill>
+                <a:latin typeface="Aptos Mono" panose="020B0009020202020204" pitchFamily="49" charset="0"/>
+              </a:rPr>
+              <a:t> x2h1</a:t>
+            </a:r>
+            <a:r>
+              <a:rPr lang="en-US" sz="1100" dirty="0">
+                <a:latin typeface="Aptos Mono" panose="020B0009020202020204" pitchFamily="49" charset="0"/>
+              </a:rPr>
+              <a:t>                                x5h0</a:t>
+            </a:r>
+            <a:r>
+              <a:rPr lang="en-US" sz="1100" dirty="0">
+                <a:solidFill>
+                  <a:srgbClr val="7030A0"/>
+                </a:solidFill>
+                <a:latin typeface="Aptos Mono" panose="020B0009020202020204" pitchFamily="49" charset="0"/>
+              </a:rPr>
+              <a:t> x5h1</a:t>
+            </a:r>
+            <a:endParaRPr lang="en-US" sz="1100" dirty="0">
+              <a:solidFill>
+                <a:srgbClr val="FF0000"/>
+              </a:solidFill>
+              <a:latin typeface="Aptos Mono" panose="020B0009020202020204" pitchFamily="49" charset="0"/>
+            </a:endParaRPr>
+          </a:p>
+          <a:p>
+            <a:r>
+              <a:rPr lang="en-US" sz="1100" dirty="0">
+                <a:latin typeface="Aptos Mono" panose="020B0009020202020204" pitchFamily="49" charset="0"/>
+              </a:rPr>
+              <a:t>             </a:t>
+            </a:r>
+            <a:r>
+              <a:rPr lang="en-US" sz="1100" dirty="0">
+                <a:solidFill>
+                  <a:srgbClr val="0070C0"/>
+                </a:solidFill>
+                <a:latin typeface="Aptos Mono" panose="020B0009020202020204" pitchFamily="49" charset="0"/>
+              </a:rPr>
+              <a:t>x0h0 x0h1</a:t>
+            </a:r>
+            <a:r>
+              <a:rPr lang="en-US" sz="1100" dirty="0">
+                <a:latin typeface="Aptos Mono" panose="020B0009020202020204" pitchFamily="49" charset="0"/>
+              </a:rPr>
+              <a:t>                         </a:t>
+            </a:r>
+            <a:r>
+              <a:rPr lang="en-US" sz="1100" dirty="0">
+                <a:solidFill>
+                  <a:srgbClr val="00B050"/>
+                </a:solidFill>
+                <a:latin typeface="Aptos Mono" panose="020B0009020202020204" pitchFamily="49" charset="0"/>
+              </a:rPr>
+              <a:t>x3h0 x3h1</a:t>
+            </a:r>
+            <a:r>
+              <a:rPr lang="en-US" sz="1100" dirty="0">
+                <a:latin typeface="Aptos Mono" panose="020B0009020202020204" pitchFamily="49" charset="0"/>
+              </a:rPr>
+              <a:t>                                </a:t>
+            </a:r>
+            <a:r>
+              <a:rPr lang="en-US" sz="1100" dirty="0">
+                <a:solidFill>
+                  <a:srgbClr val="7030A0"/>
+                </a:solidFill>
+                <a:latin typeface="Aptos Mono" panose="020B0009020202020204" pitchFamily="49" charset="0"/>
+              </a:rPr>
+              <a:t>x6h0 x6h1</a:t>
+            </a:r>
+          </a:p>
+          <a:p>
+            <a:r>
+              <a:rPr lang="en-US" sz="1100" dirty="0">
+                <a:solidFill>
+                  <a:srgbClr val="7030A0"/>
+                </a:solidFill>
+                <a:latin typeface="Aptos Mono" panose="020B0009020202020204" pitchFamily="49" charset="0"/>
+              </a:rPr>
+              <a:t>                  </a:t>
+            </a:r>
+            <a:r>
+              <a:rPr lang="en-US" sz="1100" dirty="0">
+                <a:solidFill>
+                  <a:srgbClr val="0070C0"/>
+                </a:solidFill>
+                <a:latin typeface="Aptos Mono" panose="020B0009020202020204" pitchFamily="49" charset="0"/>
+              </a:rPr>
+              <a:t>x1h0 x1h1                         </a:t>
+            </a:r>
+            <a:r>
+              <a:rPr lang="en-US" sz="1100" dirty="0">
+                <a:solidFill>
+                  <a:srgbClr val="00B050"/>
+                </a:solidFill>
+                <a:latin typeface="Aptos Mono" panose="020B0009020202020204" pitchFamily="49" charset="0"/>
+              </a:rPr>
+              <a:t>x4h0 x4h1                                </a:t>
+            </a:r>
+            <a:r>
+              <a:rPr lang="en-US" sz="1100" dirty="0">
+                <a:solidFill>
+                  <a:srgbClr val="7030A0"/>
+                </a:solidFill>
+                <a:latin typeface="Aptos Mono" panose="020B0009020202020204" pitchFamily="49" charset="0"/>
+              </a:rPr>
+              <a:t>x7h0 x7h1</a:t>
+            </a:r>
+          </a:p>
+          <a:p>
+            <a:r>
+              <a:rPr lang="en-US" sz="1100" dirty="0">
+                <a:latin typeface="Aptos Mono" panose="020B0009020202020204" pitchFamily="49" charset="0"/>
+              </a:rPr>
+              <a:t>                       </a:t>
+            </a:r>
+            <a:r>
+              <a:rPr lang="en-US" sz="1100" dirty="0">
+                <a:solidFill>
+                  <a:srgbClr val="0070C0"/>
+                </a:solidFill>
+                <a:latin typeface="Aptos Mono" panose="020B0009020202020204" pitchFamily="49" charset="0"/>
+              </a:rPr>
+              <a:t>x2h0 </a:t>
+            </a:r>
+            <a:r>
+              <a:rPr lang="en-US" sz="1100" dirty="0">
+                <a:latin typeface="Aptos Mono" panose="020B0009020202020204" pitchFamily="49" charset="0"/>
+              </a:rPr>
+              <a:t>x2h1                         </a:t>
+            </a:r>
+            <a:r>
+              <a:rPr lang="en-US" sz="1100" dirty="0">
+                <a:solidFill>
+                  <a:srgbClr val="00B050"/>
+                </a:solidFill>
+                <a:latin typeface="Aptos Mono" panose="020B0009020202020204" pitchFamily="49" charset="0"/>
+              </a:rPr>
+              <a:t>x5h0 </a:t>
+            </a:r>
+            <a:r>
+              <a:rPr lang="en-US" sz="1100" dirty="0">
+                <a:latin typeface="Aptos Mono" panose="020B0009020202020204" pitchFamily="49" charset="0"/>
+              </a:rPr>
+              <a:t>x5h1                                </a:t>
+            </a:r>
+            <a:r>
+              <a:rPr lang="en-US" sz="1100" dirty="0">
+                <a:solidFill>
+                  <a:srgbClr val="7030A0"/>
+                </a:solidFill>
+                <a:latin typeface="Aptos Mono" panose="020B0009020202020204" pitchFamily="49" charset="0"/>
+              </a:rPr>
+              <a:t>x8h0 </a:t>
+            </a:r>
+            <a:r>
+              <a:rPr lang="en-US" sz="1100" dirty="0">
+                <a:latin typeface="Aptos Mono" panose="020B0009020202020204" pitchFamily="49" charset="0"/>
+              </a:rPr>
+              <a:t>x8h1</a:t>
+            </a:r>
+          </a:p>
+          <a:p>
+            <a:r>
+              <a:rPr lang="en-US" sz="1100" dirty="0">
+                <a:latin typeface="Aptos Mono" panose="020B0009020202020204" pitchFamily="49" charset="0"/>
+              </a:rPr>
+              <a:t>         -------------------------------  ---------------------------------------  ---------------------------------------</a:t>
+            </a:r>
+          </a:p>
+          <a:p>
+            <a:r>
+              <a:rPr lang="en-US" sz="1100" dirty="0">
+                <a:latin typeface="Aptos Mono" panose="020B0009020202020204" pitchFamily="49" charset="0"/>
+              </a:rPr>
+              <a:t>         0</a:t>
+            </a:r>
+            <a:r>
+              <a:rPr lang="en-US" sz="1100" dirty="0">
+                <a:solidFill>
+                  <a:srgbClr val="0070C0"/>
+                </a:solidFill>
+                <a:latin typeface="Aptos Mono" panose="020B0009020202020204" pitchFamily="49" charset="0"/>
+              </a:rPr>
+              <a:t> x0h0 x0h1+x1h0 x1h1+x2h0 </a:t>
+            </a:r>
+            <a:r>
+              <a:rPr lang="en-US" sz="1100" dirty="0">
+                <a:latin typeface="Aptos Mono" panose="020B0009020202020204" pitchFamily="49" charset="0"/>
+              </a:rPr>
+              <a:t>x2h1  x2h0</a:t>
+            </a:r>
+            <a:r>
+              <a:rPr lang="en-US" sz="1100" dirty="0">
+                <a:solidFill>
+                  <a:srgbClr val="00B050"/>
+                </a:solidFill>
+                <a:latin typeface="Aptos Mono" panose="020B0009020202020204" pitchFamily="49" charset="0"/>
+              </a:rPr>
+              <a:t> x2h1+x3h0 x3h1+x4h0 x4h1+x5h0 </a:t>
+            </a:r>
+            <a:r>
+              <a:rPr lang="en-US" sz="1100" dirty="0">
+                <a:latin typeface="Aptos Mono" panose="020B0009020202020204" pitchFamily="49" charset="0"/>
+              </a:rPr>
+              <a:t>x5h1  x5h0</a:t>
+            </a:r>
+            <a:r>
+              <a:rPr lang="en-US" sz="1100" dirty="0">
+                <a:solidFill>
+                  <a:srgbClr val="7030A0"/>
+                </a:solidFill>
+                <a:latin typeface="Aptos Mono" panose="020B0009020202020204" pitchFamily="49" charset="0"/>
+              </a:rPr>
+              <a:t> x5h1+x6h0 x6h1+x7h0 x7h1+x8h0 </a:t>
+            </a:r>
+            <a:r>
+              <a:rPr lang="en-US" sz="1100" dirty="0">
+                <a:latin typeface="Aptos Mono" panose="020B0009020202020204" pitchFamily="49" charset="0"/>
+              </a:rPr>
+              <a:t>x8h1</a:t>
+            </a:r>
+          </a:p>
+          <a:p>
+            <a:endParaRPr lang="en-US" sz="1100" dirty="0">
+              <a:latin typeface="Aptos Mono" panose="020B0009020202020204" pitchFamily="49" charset="0"/>
+            </a:endParaRPr>
+          </a:p>
+          <a:p>
+            <a:r>
+              <a:rPr lang="en-US" sz="1100" dirty="0">
+                <a:latin typeface="Aptos Mono" panose="020B0009020202020204" pitchFamily="49" charset="0"/>
+              </a:rPr>
+              <a:t>wrap     0+x2h1 </a:t>
+            </a:r>
+            <a:r>
+              <a:rPr lang="en-US" sz="1100" dirty="0">
+                <a:solidFill>
+                  <a:srgbClr val="0070C0"/>
+                </a:solidFill>
+                <a:latin typeface="Aptos Mono" panose="020B0009020202020204" pitchFamily="49" charset="0"/>
+              </a:rPr>
+              <a:t>x0h0 x0h1+x1h0 x1h1+x2h0</a:t>
+            </a:r>
+            <a:r>
+              <a:rPr lang="en-US" sz="1100" dirty="0">
+                <a:latin typeface="Aptos Mono" panose="020B0009020202020204" pitchFamily="49" charset="0"/>
+              </a:rPr>
+              <a:t>  x2h0+x5h1 </a:t>
+            </a:r>
+            <a:r>
+              <a:rPr lang="en-US" sz="1100" dirty="0">
+                <a:solidFill>
+                  <a:srgbClr val="00B050"/>
+                </a:solidFill>
+                <a:latin typeface="Aptos Mono" panose="020B0009020202020204" pitchFamily="49" charset="0"/>
+              </a:rPr>
+              <a:t>x2h1+x3h0 x3h1+x4h0 x4h1+x5h0</a:t>
+            </a:r>
+            <a:r>
+              <a:rPr lang="en-US" sz="1100" dirty="0">
+                <a:latin typeface="Aptos Mono" panose="020B0009020202020204" pitchFamily="49" charset="0"/>
+              </a:rPr>
+              <a:t>  x5h0+x8h1 </a:t>
+            </a:r>
+            <a:r>
+              <a:rPr lang="en-US" sz="1100" dirty="0">
+                <a:solidFill>
+                  <a:srgbClr val="7030A0"/>
+                </a:solidFill>
+                <a:latin typeface="Aptos Mono" panose="020B0009020202020204" pitchFamily="49" charset="0"/>
+              </a:rPr>
+              <a:t>x5h1+x6h0 x6h1+x7h0 x7h1+x8h0</a:t>
+            </a:r>
+            <a:endParaRPr lang="en-US" sz="1100" dirty="0">
+              <a:latin typeface="Aptos Mono" panose="020B0009020202020204" pitchFamily="49" charset="0"/>
+            </a:endParaRPr>
+          </a:p>
+          <a:p>
+            <a:r>
+              <a:rPr lang="en-US" sz="1100" dirty="0">
+                <a:latin typeface="Aptos Mono" panose="020B0009020202020204" pitchFamily="49" charset="0"/>
+              </a:rPr>
+              <a:t>mod NFFT</a:t>
+            </a:r>
+          </a:p>
+          <a:p>
+            <a:r>
+              <a:rPr lang="en-US" sz="1100" dirty="0">
+                <a:latin typeface="Aptos Mono" panose="020B0009020202020204" pitchFamily="49" charset="0"/>
+              </a:rPr>
+              <a:t>       </a:t>
+            </a:r>
+          </a:p>
+          <a:p>
+            <a:r>
+              <a:rPr lang="en-US" sz="1100" dirty="0">
+                <a:latin typeface="Aptos Mono" panose="020B0009020202020204" pitchFamily="49" charset="0"/>
+              </a:rPr>
+              <a:t>Discard and concatenate</a:t>
+            </a:r>
+          </a:p>
+          <a:p>
+            <a:endParaRPr lang="en-US" sz="1100" dirty="0">
+              <a:latin typeface="Aptos Mono" panose="020B0009020202020204" pitchFamily="49" charset="0"/>
+            </a:endParaRPr>
+          </a:p>
+          <a:p>
+            <a:endParaRPr lang="en-US" sz="1100" dirty="0">
+              <a:latin typeface="Aptos Mono" panose="020B0009020202020204" pitchFamily="49" charset="0"/>
+            </a:endParaRPr>
+          </a:p>
+          <a:p>
+            <a:r>
+              <a:rPr lang="en-US" sz="1100" dirty="0">
+                <a:latin typeface="Aptos Mono" panose="020B0009020202020204" pitchFamily="49" charset="0"/>
+              </a:rPr>
+              <a:t>y[n]-&gt;   </a:t>
+            </a:r>
+            <a:r>
+              <a:rPr lang="en-US" sz="1100" dirty="0">
+                <a:solidFill>
+                  <a:srgbClr val="0070C0"/>
+                </a:solidFill>
+                <a:latin typeface="Aptos Mono" panose="020B0009020202020204" pitchFamily="49" charset="0"/>
+              </a:rPr>
+              <a:t>x0h0 x0h1+x1h0 x1h1+x2h0 </a:t>
+            </a:r>
+            <a:r>
+              <a:rPr lang="en-US" sz="1100" dirty="0">
+                <a:solidFill>
+                  <a:srgbClr val="00B050"/>
+                </a:solidFill>
+                <a:latin typeface="Aptos Mono" panose="020B0009020202020204" pitchFamily="49" charset="0"/>
+              </a:rPr>
+              <a:t>x2h1+x3h0 x3h1+x4h0 x4h1+x5h0 </a:t>
+            </a:r>
+            <a:r>
+              <a:rPr lang="en-US" sz="1100" dirty="0">
+                <a:solidFill>
+                  <a:srgbClr val="7030A0"/>
+                </a:solidFill>
+                <a:latin typeface="Aptos Mono" panose="020B0009020202020204" pitchFamily="49" charset="0"/>
+              </a:rPr>
+              <a:t>x5h1+x6h0 x6h1+x7h0 x7h1+x8h0 ……</a:t>
+            </a:r>
+            <a:endParaRPr lang="en-US" sz="1100" dirty="0">
+              <a:solidFill>
+                <a:srgbClr val="FF0000"/>
+              </a:solidFill>
+              <a:latin typeface="Aptos Mono" panose="020B0009020202020204" pitchFamily="49" charset="0"/>
+            </a:endParaRPr>
+          </a:p>
+        </p:txBody>
+      </p:sp>
+      <mc:AlternateContent xmlns:mc="http://schemas.openxmlformats.org/markup-compatibility/2006" xmlns:a14="http://schemas.microsoft.com/office/drawing/2010/main">
+        <mc:Choice Requires="a14">
+          <p:sp>
+            <p:nvSpPr>
+              <p:cNvPr id="4" name="TextBox 3">
+                <a:extLst>
+                  <a:ext uri="{FF2B5EF4-FFF2-40B4-BE49-F238E27FC236}">
+                    <a16:creationId xmlns:a16="http://schemas.microsoft.com/office/drawing/2014/main" id="{F5C1B57A-4559-ADA5-FE8E-3C5469A36298}"/>
+                  </a:ext>
+                </a:extLst>
+              </p:cNvPr>
+              <p:cNvSpPr txBox="1"/>
+              <p:nvPr/>
+            </p:nvSpPr>
+            <p:spPr>
+              <a:xfrm>
+                <a:off x="600740" y="5113090"/>
+                <a:ext cx="4418581" cy="784254"/>
+              </a:xfrm>
+              <a:prstGeom prst="rect">
+                <a:avLst/>
+              </a:prstGeom>
+              <a:noFill/>
+            </p:spPr>
+            <p:txBody>
+              <a:bodyPr wrap="none" rtlCol="0">
+                <a:spAutoFit/>
+              </a:bodyPr>
+              <a:lstStyle/>
+              <a:p>
+                <a:pPr/>
+                <a14:m>
+                  <m:oMathPara xmlns:m="http://schemas.openxmlformats.org/officeDocument/2006/math">
+                    <m:oMath>
+                      <m:r>
+                        <a:rPr lang="en-US" sz="1600" b="0" i="1" smtClean="0">
+                          <a:latin typeface="Cambria Math" panose="02040503050406030204" pitchFamily="18" charset="0"/>
+                        </a:rPr>
+                        <m:t>𝑦</m:t>
+                      </m:r>
+                      <m:d>
+                        <m:dPr>
+                          <m:begChr m:val="["/>
+                          <m:endChr m:val="]"/>
+                          <m:ctrlPr>
+                            <a:rPr lang="en-US" sz="1600" b="0" i="1" smtClean="0">
+                              <a:latin typeface="Cambria Math" panose="02040503050406030204" pitchFamily="18" charset="0"/>
+                            </a:rPr>
+                          </m:ctrlPr>
+                        </m:dPr>
+                        <m:e>
+                          <m:r>
+                            <a:rPr lang="en-US" sz="1600" b="0" i="1" smtClean="0">
+                              <a:latin typeface="Cambria Math" panose="02040503050406030204" pitchFamily="18" charset="0"/>
+                            </a:rPr>
+                            <m:t>𝑛</m:t>
+                          </m:r>
+                        </m:e>
+                      </m:d>
+                      <m:r>
+                        <a:rPr lang="en-US" sz="1600" b="0" i="1" smtClean="0">
+                          <a:latin typeface="Cambria Math" panose="02040503050406030204" pitchFamily="18" charset="0"/>
+                        </a:rPr>
+                        <m:t>=</m:t>
+                      </m:r>
+                      <m:nary>
+                        <m:naryPr>
+                          <m:chr m:val="∑"/>
+                          <m:ctrlPr>
+                            <a:rPr lang="en-US" sz="1600" b="0" i="1" smtClean="0">
+                              <a:latin typeface="Cambria Math" panose="02040503050406030204" pitchFamily="18" charset="0"/>
+                            </a:rPr>
+                          </m:ctrlPr>
+                        </m:naryPr>
+                        <m:sub>
+                          <m:r>
+                            <m:rPr>
+                              <m:brk m:alnAt="23"/>
+                            </m:rPr>
+                            <a:rPr lang="en-US" sz="1600" b="0" i="1" smtClean="0">
+                              <a:latin typeface="Cambria Math" panose="02040503050406030204" pitchFamily="18" charset="0"/>
+                            </a:rPr>
+                            <m:t>𝑘</m:t>
+                          </m:r>
+                          <m:r>
+                            <m:rPr>
+                              <m:brk m:alnAt="23"/>
+                            </m:rPr>
+                            <a:rPr lang="en-US" sz="1600" b="0" i="1" smtClean="0">
+                              <a:latin typeface="Cambria Math" panose="02040503050406030204" pitchFamily="18" charset="0"/>
+                            </a:rPr>
+                            <m:t>=</m:t>
+                          </m:r>
+                          <m:r>
+                            <m:rPr>
+                              <m:brk m:alnAt="23"/>
+                            </m:rPr>
+                            <a:rPr lang="en-US" sz="1600" b="0" i="1" smtClean="0">
+                              <a:latin typeface="Cambria Math" panose="02040503050406030204" pitchFamily="18" charset="0"/>
+                            </a:rPr>
+                            <m:t>0</m:t>
+                          </m:r>
+                        </m:sub>
+                        <m:sup>
+                          <m:r>
+                            <a:rPr lang="en-US" sz="1600" b="0" i="1" smtClean="0">
+                              <a:latin typeface="Cambria Math" panose="02040503050406030204" pitchFamily="18" charset="0"/>
+                            </a:rPr>
+                            <m:t>1</m:t>
+                          </m:r>
+                        </m:sup>
+                        <m:e>
+                          <m:r>
+                            <a:rPr lang="en-US" sz="1600" b="0" i="1" smtClean="0">
+                              <a:latin typeface="Cambria Math" panose="02040503050406030204" pitchFamily="18" charset="0"/>
+                            </a:rPr>
+                            <m:t>ℎ</m:t>
+                          </m:r>
+                          <m:d>
+                            <m:dPr>
+                              <m:begChr m:val="["/>
+                              <m:endChr m:val="]"/>
+                              <m:ctrlPr>
+                                <a:rPr lang="en-US" sz="1600" b="0" i="1" smtClean="0">
+                                  <a:latin typeface="Cambria Math" panose="02040503050406030204" pitchFamily="18" charset="0"/>
+                                </a:rPr>
+                              </m:ctrlPr>
+                            </m:dPr>
+                            <m:e>
+                              <m:r>
+                                <a:rPr lang="en-US" sz="1600" b="0" i="1" smtClean="0">
+                                  <a:latin typeface="Cambria Math" panose="02040503050406030204" pitchFamily="18" charset="0"/>
+                                </a:rPr>
+                                <m:t>𝑘</m:t>
+                              </m:r>
+                            </m:e>
+                          </m:d>
+                          <m:r>
+                            <a:rPr lang="en-US" sz="1600" b="0" i="1" smtClean="0">
+                              <a:latin typeface="Cambria Math" panose="02040503050406030204" pitchFamily="18" charset="0"/>
+                            </a:rPr>
+                            <m:t>𝑥</m:t>
+                          </m:r>
+                          <m:r>
+                            <a:rPr lang="en-US" sz="1600" b="0" i="1" smtClean="0">
+                              <a:latin typeface="Cambria Math" panose="02040503050406030204" pitchFamily="18" charset="0"/>
+                            </a:rPr>
+                            <m:t>[</m:t>
+                          </m:r>
+                          <m:r>
+                            <a:rPr lang="en-US" sz="1600" b="0" i="1" smtClean="0">
+                              <a:latin typeface="Cambria Math" panose="02040503050406030204" pitchFamily="18" charset="0"/>
+                            </a:rPr>
+                            <m:t>𝑛</m:t>
+                          </m:r>
+                          <m:r>
+                            <a:rPr lang="en-US" sz="1600" b="0" i="1" smtClean="0">
+                              <a:latin typeface="Cambria Math" panose="02040503050406030204" pitchFamily="18" charset="0"/>
+                            </a:rPr>
+                            <m:t>−</m:t>
+                          </m:r>
+                          <m:r>
+                            <a:rPr lang="en-US" sz="1600" b="0" i="1" smtClean="0">
+                              <a:latin typeface="Cambria Math" panose="02040503050406030204" pitchFamily="18" charset="0"/>
+                            </a:rPr>
+                            <m:t>𝑘</m:t>
+                          </m:r>
+                          <m:r>
+                            <a:rPr lang="en-US" sz="1600" b="0" i="1" smtClean="0">
+                              <a:latin typeface="Cambria Math" panose="02040503050406030204" pitchFamily="18" charset="0"/>
+                            </a:rPr>
+                            <m:t>]</m:t>
+                          </m:r>
+                        </m:e>
+                      </m:nary>
+                      <m:r>
+                        <a:rPr lang="en-US" sz="1600" b="0" i="1" smtClean="0">
+                          <a:latin typeface="Cambria Math" panose="02040503050406030204" pitchFamily="18" charset="0"/>
+                        </a:rPr>
+                        <m:t>=</m:t>
+                      </m:r>
+                      <m:nary>
+                        <m:naryPr>
+                          <m:chr m:val="∑"/>
+                          <m:ctrlPr>
+                            <a:rPr lang="en-US" sz="1600" b="0" i="1" smtClean="0">
+                              <a:latin typeface="Cambria Math" panose="02040503050406030204" pitchFamily="18" charset="0"/>
+                            </a:rPr>
+                          </m:ctrlPr>
+                        </m:naryPr>
+                        <m:sub>
+                          <m:r>
+                            <m:rPr>
+                              <m:brk m:alnAt="23"/>
+                            </m:rPr>
+                            <a:rPr lang="en-US" sz="1600" b="0" i="1" smtClean="0">
+                              <a:latin typeface="Cambria Math" panose="02040503050406030204" pitchFamily="18" charset="0"/>
+                            </a:rPr>
+                            <m:t>𝑚</m:t>
+                          </m:r>
+                          <m:r>
+                            <m:rPr>
+                              <m:brk m:alnAt="23"/>
+                            </m:rPr>
+                            <a:rPr lang="en-US" sz="1600" b="0" i="1" smtClean="0">
+                              <a:latin typeface="Cambria Math" panose="02040503050406030204" pitchFamily="18" charset="0"/>
+                            </a:rPr>
+                            <m:t>=</m:t>
+                          </m:r>
+                          <m:r>
+                            <m:rPr>
+                              <m:brk m:alnAt="23"/>
+                            </m:rPr>
+                            <a:rPr lang="en-US" sz="1600" b="0" i="1" smtClean="0">
+                              <a:latin typeface="Cambria Math" panose="02040503050406030204" pitchFamily="18" charset="0"/>
+                            </a:rPr>
+                            <m:t>𝑛</m:t>
+                          </m:r>
+                          <m:r>
+                            <m:rPr>
+                              <m:brk m:alnAt="23"/>
+                            </m:rPr>
+                            <a:rPr lang="en-US" sz="1600" b="0" i="1" smtClean="0">
+                              <a:latin typeface="Cambria Math" panose="02040503050406030204" pitchFamily="18" charset="0"/>
+                            </a:rPr>
+                            <m:t>−</m:t>
+                          </m:r>
+                          <m:r>
+                            <m:rPr>
+                              <m:brk m:alnAt="23"/>
+                            </m:rPr>
+                            <a:rPr lang="en-US" sz="1600" b="0" i="1" smtClean="0">
+                              <a:latin typeface="Cambria Math" panose="02040503050406030204" pitchFamily="18" charset="0"/>
+                            </a:rPr>
+                            <m:t>1</m:t>
+                          </m:r>
+                        </m:sub>
+                        <m:sup>
+                          <m:r>
+                            <a:rPr lang="en-US" sz="1600" b="0" i="1" smtClean="0">
+                              <a:latin typeface="Cambria Math" panose="02040503050406030204" pitchFamily="18" charset="0"/>
+                            </a:rPr>
+                            <m:t>𝑛</m:t>
+                          </m:r>
+                        </m:sup>
+                        <m:e>
+                          <m:r>
+                            <a:rPr lang="en-US" sz="1600" b="0" i="1" smtClean="0">
+                              <a:latin typeface="Cambria Math" panose="02040503050406030204" pitchFamily="18" charset="0"/>
+                            </a:rPr>
+                            <m:t>𝑥</m:t>
+                          </m:r>
+                          <m:d>
+                            <m:dPr>
+                              <m:begChr m:val="["/>
+                              <m:endChr m:val="]"/>
+                              <m:ctrlPr>
+                                <a:rPr lang="en-US" sz="1600" b="0" i="1" smtClean="0">
+                                  <a:latin typeface="Cambria Math" panose="02040503050406030204" pitchFamily="18" charset="0"/>
+                                </a:rPr>
+                              </m:ctrlPr>
+                            </m:dPr>
+                            <m:e>
+                              <m:r>
+                                <a:rPr lang="en-US" sz="1600" b="0" i="1" smtClean="0">
+                                  <a:latin typeface="Cambria Math" panose="02040503050406030204" pitchFamily="18" charset="0"/>
+                                </a:rPr>
+                                <m:t>𝑚</m:t>
+                              </m:r>
+                            </m:e>
+                          </m:d>
+                          <m:r>
+                            <a:rPr lang="en-US" sz="1600" b="0" i="1" smtClean="0">
+                              <a:latin typeface="Cambria Math" panose="02040503050406030204" pitchFamily="18" charset="0"/>
+                            </a:rPr>
+                            <m:t>ℎ</m:t>
+                          </m:r>
+                          <m:r>
+                            <a:rPr lang="en-US" sz="1600" b="0" i="1" smtClean="0">
+                              <a:latin typeface="Cambria Math" panose="02040503050406030204" pitchFamily="18" charset="0"/>
+                            </a:rPr>
+                            <m:t>[</m:t>
+                          </m:r>
+                          <m:r>
+                            <a:rPr lang="en-US" sz="1600" b="0" i="1" smtClean="0">
+                              <a:latin typeface="Cambria Math" panose="02040503050406030204" pitchFamily="18" charset="0"/>
+                            </a:rPr>
+                            <m:t>𝑛</m:t>
+                          </m:r>
+                          <m:r>
+                            <a:rPr lang="en-US" sz="1600" b="0" i="1" smtClean="0">
+                              <a:latin typeface="Cambria Math" panose="02040503050406030204" pitchFamily="18" charset="0"/>
+                            </a:rPr>
+                            <m:t>−</m:t>
+                          </m:r>
+                          <m:r>
+                            <a:rPr lang="en-US" sz="1600" b="0" i="1" smtClean="0">
+                              <a:latin typeface="Cambria Math" panose="02040503050406030204" pitchFamily="18" charset="0"/>
+                            </a:rPr>
+                            <m:t>𝑚</m:t>
+                          </m:r>
+                          <m:r>
+                            <a:rPr lang="en-US" sz="1600" b="0" i="1" smtClean="0">
+                              <a:latin typeface="Cambria Math" panose="02040503050406030204" pitchFamily="18" charset="0"/>
+                            </a:rPr>
+                            <m:t>]</m:t>
+                          </m:r>
+                        </m:e>
+                      </m:nary>
+                    </m:oMath>
+                  </m:oMathPara>
+                </a14:m>
+                <a:endParaRPr lang="en-US" sz="1600" dirty="0"/>
+              </a:p>
+            </p:txBody>
+          </p:sp>
+        </mc:Choice>
+        <mc:Fallback xmlns="">
+          <p:sp>
+            <p:nvSpPr>
+              <p:cNvPr id="4" name="TextBox 3">
+                <a:extLst>
+                  <a:ext uri="{FF2B5EF4-FFF2-40B4-BE49-F238E27FC236}">
+                    <a16:creationId xmlns:a16="http://schemas.microsoft.com/office/drawing/2014/main" id="{F5C1B57A-4559-ADA5-FE8E-3C5469A36298}"/>
+                  </a:ext>
+                </a:extLst>
+              </p:cNvPr>
+              <p:cNvSpPr txBox="1">
+                <a:spLocks noRot="1" noChangeAspect="1" noMove="1" noResize="1" noEditPoints="1" noAdjustHandles="1" noChangeArrowheads="1" noChangeShapeType="1" noTextEdit="1"/>
+              </p:cNvSpPr>
+              <p:nvPr/>
+            </p:nvSpPr>
+            <p:spPr>
+              <a:xfrm>
+                <a:off x="600740" y="5113090"/>
+                <a:ext cx="4418581" cy="784254"/>
+              </a:xfrm>
+              <a:prstGeom prst="rect">
+                <a:avLst/>
+              </a:prstGeom>
+              <a:blipFill>
+                <a:blip r:embed="rId2"/>
+                <a:stretch>
+                  <a:fillRect/>
+                </a:stretch>
+              </a:blipFill>
+            </p:spPr>
+            <p:txBody>
+              <a:bodyPr/>
+              <a:lstStyle/>
+              <a:p>
+                <a:r>
+                  <a:rPr lang="en-US">
+                    <a:noFill/>
+                  </a:rPr>
+                  <a:t> </a:t>
+                </a:r>
+              </a:p>
+            </p:txBody>
+          </p:sp>
+        </mc:Fallback>
+      </mc:AlternateContent>
     </p:spTree>
+    <p:extLst>
+      <p:ext uri="{BB962C8B-B14F-4D97-AF65-F5344CB8AC3E}">
+        <p14:creationId xmlns:p14="http://schemas.microsoft.com/office/powerpoint/2010/main" val="1967193734"/>
+      </p:ext>
+    </p:extLst>
   </p:cSld>
   <p:clrMapOvr>
     <a:masterClrMapping/>
@@ -6881,7 +8044,7 @@
                 </a:solidFill>
                 <a:latin typeface="Aptos"/>
               </a:rPr>
-              <a:t>ML pipeline connection</a:t>
+              <a:t>OLA versus OLS: engineering trade-offs</a:t>
             </a:r>
           </a:p>
         </p:txBody>
@@ -6916,7 +8079,7 @@
                 </a:solidFill>
                 <a:latin typeface="Aptos"/>
               </a:rPr>
-              <a:t>ML BRIDGE</a:t>
+              <a:t>STREAMING</a:t>
             </a:r>
           </a:p>
         </p:txBody>
@@ -6951,7 +8114,7 @@
                 </a:solidFill>
                 <a:latin typeface="Aptos"/>
               </a:rPr>
-              <a:t>1:13–1:14</a:t>
+              <a:t>1:06–1:10</a:t>
             </a:r>
           </a:p>
         </p:txBody>
@@ -6999,8 +8162,8 @@
         </p:nvSpPr>
         <p:spPr>
           <a:xfrm>
-            <a:off x="777240" y="1417320"/>
-            <a:ext cx="10607040" cy="548640"/>
+            <a:off x="822960" y="1325880"/>
+            <a:ext cx="2743200" cy="365760"/>
           </a:xfrm>
           <a:prstGeom prst="rect">
             <a:avLst/>
@@ -7015,13 +8178,13 @@
           <a:p>
             <a:pPr algn="l"/>
             <a:r>
-              <a:rPr sz="2600" b="1">
-                <a:solidFill>
-                  <a:srgbClr val="16253E"/>
-                </a:solidFill>
-                <a:latin typeface="Aptos"/>
-              </a:rPr>
-              <a:t>stream → fast FIR / resampling → framing → features → model</a:t>
+              <a:rPr sz="2300" b="1">
+                <a:solidFill>
+                  <a:srgbClr val="2463A0"/>
+                </a:solidFill>
+                <a:latin typeface="Aptos"/>
+              </a:rPr>
+              <a:t>Overlap-Add</a:t>
             </a:r>
           </a:p>
         </p:txBody>
@@ -7034,8 +8197,8 @@
         </p:nvSpPr>
         <p:spPr>
           <a:xfrm>
-            <a:off x="822960" y="2514600"/>
-            <a:ext cx="10241280" cy="2011680"/>
+            <a:off x="822960" y="1828800"/>
+            <a:ext cx="4572000" cy="2103120"/>
           </a:xfrm>
           <a:prstGeom prst="rect">
             <a:avLst/>
@@ -7052,7 +8215,7 @@
               <a:spcAft>
                 <a:spcPts val="700"/>
               </a:spcAft>
-              <a:defRPr sz="2000">
+              <a:defRPr sz="1900">
                 <a:solidFill>
                   <a:srgbClr val="191E26"/>
                 </a:solidFill>
@@ -7060,7 +8223,7 @@
               </a:defRPr>
             </a:pPr>
             <a:r>
-              <a:t>• Fast convolution lets expensive preprocessing run continuously without changing the filter response.</a:t>
+              <a:t>• Simple conceptual decomposition.</a:t>
             </a:r>
           </a:p>
           <a:p>
@@ -7068,7 +8231,7 @@
               <a:spcAft>
                 <a:spcPts val="700"/>
               </a:spcAft>
-              <a:defRPr sz="2000">
+              <a:defRPr sz="1900">
                 <a:solidFill>
                   <a:srgbClr val="191E26"/>
                 </a:solidFill>
@@ -7076,7 +8239,7 @@
               </a:defRPr>
             </a:pPr>
             <a:r>
-              <a:t>• The same block boundaries should not create artifacts that leak into ML features.</a:t>
+              <a:t>• Needs an output accumulation buffer.</a:t>
             </a:r>
           </a:p>
           <a:p>
@@ -7084,7 +8247,7 @@
               <a:spcAft>
                 <a:spcPts val="700"/>
               </a:spcAft>
-              <a:defRPr sz="2000">
+              <a:defRPr sz="1900">
                 <a:solidFill>
                   <a:srgbClr val="191E26"/>
                 </a:solidFill>
@@ -7092,21 +8255,127 @@
               </a:defRPr>
             </a:pPr>
             <a:r>
-              <a:t>• Streaming DSP and streaming inference must share latency and buffer budgets.</a:t>
-            </a:r>
-          </a:p>
-        </p:txBody>
-      </p:sp>
-      <p:sp>
-        <p:nvSpPr>
-          <p:cNvPr id="9" name="Rounded Rectangle 8"/>
+              <a:t>• Input blocks are non-overlapping.</a:t>
+            </a:r>
+          </a:p>
+        </p:txBody>
+      </p:sp>
+      <p:sp>
+        <p:nvSpPr>
+          <p:cNvPr id="9" name="TextBox 8"/>
+          <p:cNvSpPr txBox="1"/>
+          <p:nvPr/>
+        </p:nvSpPr>
+        <p:spPr>
+          <a:xfrm>
+            <a:off x="6309360" y="1325880"/>
+            <a:ext cx="2743200" cy="365760"/>
+          </a:xfrm>
+          <a:prstGeom prst="rect">
+            <a:avLst/>
+          </a:prstGeom>
+          <a:noFill/>
+        </p:spPr>
+        <p:txBody>
+          <a:bodyPr wrap="square">
+            <a:spAutoFit/>
+          </a:bodyPr>
+          <a:lstStyle/>
+          <a:p>
+            <a:pPr algn="l"/>
+            <a:r>
+              <a:rPr sz="2300" b="1">
+                <a:solidFill>
+                  <a:srgbClr val="24888E"/>
+                </a:solidFill>
+                <a:latin typeface="Aptos"/>
+              </a:rPr>
+              <a:t>Overlap-Save</a:t>
+            </a:r>
+          </a:p>
+        </p:txBody>
+      </p:sp>
+      <p:sp>
+        <p:nvSpPr>
+          <p:cNvPr id="10" name="TextBox 9"/>
+          <p:cNvSpPr txBox="1"/>
+          <p:nvPr/>
+        </p:nvSpPr>
+        <p:spPr>
+          <a:xfrm>
+            <a:off x="6309360" y="1828800"/>
+            <a:ext cx="4572000" cy="2103120"/>
+          </a:xfrm>
+          <a:prstGeom prst="rect">
+            <a:avLst/>
+          </a:prstGeom>
+          <a:noFill/>
+        </p:spPr>
+        <p:txBody>
+          <a:bodyPr wrap="square">
+            <a:spAutoFit/>
+          </a:bodyPr>
+          <a:lstStyle/>
+          <a:p>
+            <a:pPr>
+              <a:spcAft>
+                <a:spcPts val="700"/>
+              </a:spcAft>
+              <a:defRPr sz="1900">
+                <a:solidFill>
+                  <a:srgbClr val="191E26"/>
+                </a:solidFill>
+                <a:latin typeface="Aptos"/>
+              </a:defRPr>
+            </a:pPr>
+            <a:r>
+              <a:t>• Input blocks overlap by Lh − 1.</a:t>
+            </a:r>
+          </a:p>
+          <a:p>
+            <a:pPr>
+              <a:spcAft>
+                <a:spcPts val="700"/>
+              </a:spcAft>
+              <a:defRPr sz="1900">
+                <a:solidFill>
+                  <a:srgbClr val="191E26"/>
+                </a:solidFill>
+                <a:latin typeface="Aptos"/>
+              </a:defRPr>
+            </a:pPr>
+            <a:r>
+              <a:t>• No output addition step.</a:t>
+            </a:r>
+          </a:p>
+          <a:p>
+            <a:pPr>
+              <a:spcAft>
+                <a:spcPts val="700"/>
+              </a:spcAft>
+              <a:defRPr sz="1900">
+                <a:solidFill>
+                  <a:srgbClr val="191E26"/>
+                </a:solidFill>
+                <a:latin typeface="Aptos"/>
+              </a:defRPr>
+            </a:pPr>
+            <a:r>
+              <a:t>• Discard first Lh − 1 samples per block.</a:t>
+            </a:r>
+          </a:p>
+        </p:txBody>
+      </p:sp>
+      <p:sp>
+        <p:nvSpPr>
+          <p:cNvPr id="11" name="Rounded Rectangle 10"/>
           <p:cNvSpPr/>
           <p:nvPr/>
         </p:nvSpPr>
         <p:spPr>
           <a:xfrm>
-            <a:off x="2011680" y="4800600"/>
-            <a:ext cx="8046720" cy="822960"/>
+            <a:off x="1920240" y="4709159"/>
+            <a:ext cx="8229600" cy="1032421"/>
           </a:xfrm>
           <a:prstGeom prst="roundRect">
             <a:avLst/>
@@ -7145,14 +8414,14 @@
       </p:sp>
       <p:sp>
         <p:nvSpPr>
-          <p:cNvPr id="10" name="TextBox 9"/>
-          <p:cNvSpPr txBox="1"/>
-          <p:nvPr/>
-        </p:nvSpPr>
-        <p:spPr>
-          <a:xfrm>
-            <a:off x="2157984" y="4892040"/>
-            <a:ext cx="7754112" cy="219456"/>
+          <p:cNvPr id="12" name="TextBox 11"/>
+          <p:cNvSpPr txBox="1"/>
+          <p:nvPr/>
+        </p:nvSpPr>
+        <p:spPr>
+          <a:xfrm>
+            <a:off x="2066544" y="4800600"/>
+            <a:ext cx="7936992" cy="219456"/>
           </a:xfrm>
           <a:prstGeom prst="rect">
             <a:avLst/>
@@ -7173,21 +8442,21 @@
                 </a:solidFill>
                 <a:latin typeface="Aptos"/>
               </a:rPr>
-              <a:t>Think like a system designer</a:t>
-            </a:r>
-          </a:p>
-        </p:txBody>
-      </p:sp>
-      <p:sp>
-        <p:nvSpPr>
-          <p:cNvPr id="11" name="TextBox 10"/>
-          <p:cNvSpPr txBox="1"/>
-          <p:nvPr/>
-        </p:nvSpPr>
-        <p:spPr>
-          <a:xfrm>
-            <a:off x="2157984" y="5157216"/>
-            <a:ext cx="7754112" cy="374904"/>
+              <a:t>Both</a:t>
+            </a:r>
+          </a:p>
+        </p:txBody>
+      </p:sp>
+      <p:sp>
+        <p:nvSpPr>
+          <p:cNvPr id="13" name="TextBox 12"/>
+          <p:cNvSpPr txBox="1"/>
+          <p:nvPr/>
+        </p:nvSpPr>
+        <p:spPr>
+          <a:xfrm>
+            <a:off x="2066544" y="5065776"/>
+            <a:ext cx="7936992" cy="466344"/>
           </a:xfrm>
           <a:prstGeom prst="rect">
             <a:avLst/>
@@ -7208,7 +8477,7 @@
                 </a:solidFill>
                 <a:latin typeface="Aptos"/>
               </a:rPr>
-              <a:t>Accuracy, throughput, latency, and numerical equivalence all matter.</a:t>
+              <a:t>Reuse H[k] for every block and can be much faster than direct convolution for long FIR filters.</a:t>
             </a:r>
           </a:p>
         </p:txBody>
@@ -7299,7 +8568,7 @@
         <p:spPr>
           <a:xfrm>
             <a:off x="502920" y="320040"/>
-            <a:ext cx="10972800" cy="538609"/>
+            <a:ext cx="10972800" cy="502920"/>
           </a:xfrm>
           <a:prstGeom prst="rect">
             <a:avLst/>
@@ -7314,31 +8583,13 @@
           <a:p>
             <a:pPr algn="l"/>
             <a:r>
-              <a:rPr sz="2900" b="1" dirty="0">
+              <a:rPr sz="2900" b="1">
                 <a:solidFill>
                   <a:srgbClr val="16253E"/>
                 </a:solidFill>
                 <a:latin typeface="Aptos"/>
               </a:rPr>
-              <a:t>Lecture 1</a:t>
-            </a:r>
-            <a:r>
-              <a:rPr lang="en-US" sz="2900" b="1" dirty="0">
-                <a:solidFill>
-                  <a:srgbClr val="16253E"/>
-                </a:solidFill>
-                <a:latin typeface="Aptos"/>
-              </a:rPr>
-              <a:t>1</a:t>
-            </a:r>
-            <a:r>
-              <a:rPr sz="2900" b="1" dirty="0">
-                <a:solidFill>
-                  <a:srgbClr val="16253E"/>
-                </a:solidFill>
-                <a:latin typeface="Aptos"/>
-              </a:rPr>
-              <a:t> wrap-up</a:t>
+              <a:t>Choosing FFT and block sizes</a:t>
             </a:r>
           </a:p>
         </p:txBody>
@@ -7373,7 +8624,7 @@
                 </a:solidFill>
                 <a:latin typeface="Aptos"/>
               </a:rPr>
-              <a:t>WRAP-UP</a:t>
+              <a:t>STREAMING</a:t>
             </a:r>
           </a:p>
         </p:txBody>
@@ -7408,7 +8659,7 @@
                 </a:solidFill>
                 <a:latin typeface="Aptos"/>
               </a:rPr>
-              <a:t>1:14–1:15</a:t>
+              <a:t>1:10–1:13</a:t>
             </a:r>
           </a:p>
         </p:txBody>
@@ -7456,8 +8707,8 @@
         </p:nvSpPr>
         <p:spPr>
           <a:xfrm>
-            <a:off x="731520" y="1280160"/>
-            <a:ext cx="7498079" cy="3200400"/>
+            <a:off x="731520" y="1325880"/>
+            <a:ext cx="6675120" cy="3108960"/>
           </a:xfrm>
           <a:prstGeom prst="rect">
             <a:avLst/>
@@ -7482,7 +8733,7 @@
               </a:defRPr>
             </a:pPr>
             <a:r>
-              <a:t>• The DFT samples the finite-record DTFT.</a:t>
+              <a:t>• Larger FFTs often improve arithmetic efficiency per sample but increase buffering latency.</a:t>
             </a:r>
           </a:p>
           <a:p>
@@ -7498,7 +8749,7 @@
               </a:defRPr>
             </a:pPr>
             <a:r>
-              <a:t>• DFT multiplication gives circular convolution.</a:t>
+              <a:t>• Short blocks reduce latency but increase FFT overhead.</a:t>
             </a:r>
           </a:p>
           <a:p>
@@ -7514,7 +8765,7 @@
               </a:defRPr>
             </a:pPr>
             <a:r>
-              <a:t>• Zero-padding prevents wrap-around and recovers linear convolution.</a:t>
+              <a:t>• Choose NFFT using measured platform performance, not only asymptotic complexity.</a:t>
             </a:r>
           </a:p>
           <a:p>
@@ -7530,23 +8781,7 @@
               </a:defRPr>
             </a:pPr>
             <a:r>
-              <a:t>• Overlap-add and overlap-save extend FFT convolution to endless streams.</a:t>
-            </a:r>
-          </a:p>
-          <a:p>
-            <a:pPr>
-              <a:spcAft>
-                <a:spcPts val="700"/>
-              </a:spcAft>
-              <a:defRPr sz="2000">
-                <a:solidFill>
-                  <a:srgbClr val="191E26"/>
-                </a:solidFill>
-                <a:latin typeface="Aptos"/>
-              </a:defRPr>
-            </a:pPr>
-            <a:r>
-              <a:t>• Block size is both a DSP and systems-design parameter.</a:t>
+              <a:t>• On an edge device, memory movement and cache behavior can matter as much as multiply counts.</a:t>
             </a:r>
           </a:p>
         </p:txBody>
@@ -7559,8 +8794,8 @@
         </p:nvSpPr>
         <p:spPr>
           <a:xfrm>
-            <a:off x="8366760" y="1554480"/>
-            <a:ext cx="3017520" cy="2011680"/>
+            <a:off x="7680960" y="1554480"/>
+            <a:ext cx="3657600" cy="2148840"/>
           </a:xfrm>
           <a:prstGeom prst="roundRect">
             <a:avLst/>
@@ -7605,8 +8840,8 @@
         </p:nvSpPr>
         <p:spPr>
           <a:xfrm>
-            <a:off x="8513064" y="1645920"/>
-            <a:ext cx="2724912" cy="219456"/>
+            <a:off x="7827264" y="1645920"/>
+            <a:ext cx="3364992" cy="219456"/>
           </a:xfrm>
           <a:prstGeom prst="rect">
             <a:avLst/>
@@ -7627,7 +8862,7 @@
                 </a:solidFill>
                 <a:latin typeface="Aptos"/>
               </a:rPr>
-              <a:t>Exit ticket</a:t>
+              <a:t>Design question</a:t>
             </a:r>
           </a:p>
         </p:txBody>
@@ -7640,8 +8875,8 @@
         </p:nvSpPr>
         <p:spPr>
           <a:xfrm>
-            <a:off x="8513064" y="1911095"/>
-            <a:ext cx="2724912" cy="1563624"/>
+            <a:off x="7827264" y="1911095"/>
+            <a:ext cx="3364992" cy="1700784"/>
           </a:xfrm>
           <a:prstGeom prst="rect">
             <a:avLst/>
@@ -7662,7 +8897,7 @@
                 </a:solidFill>
                 <a:latin typeface="Aptos"/>
               </a:rPr>
-              <a:t>Why is NFFT ≥ B + Lh − 1 required in overlap-add, and what fails if NFFT is smaller?</a:t>
+              <a:t>A classifier needs 10-ms latency. Would a huge “efficient” FFT block still be acceptable? No—the end-to-end latency constraint dominates.</a:t>
             </a:r>
           </a:p>
         </p:txBody>
@@ -7860,6 +9095,899 @@
                 <a:latin typeface="Aptos"/>
               </a:rPr>
               <a:t>Oppenheim &amp; Schafer • DFT / FFT / STFT  |  Raschka • CNN architecture and feature pipelines</a:t>
+            </a:r>
+          </a:p>
+        </p:txBody>
+      </p:sp>
+    </p:spTree>
+  </p:cSld>
+  <p:clrMapOvr>
+    <a:masterClrMapping/>
+  </p:clrMapOvr>
+</p:sld>
+</file>
+
+<file path=ppt/slides/slide20.xml><?xml version="1.0" encoding="utf-8"?>
+<p:sld xmlns:a="http://schemas.openxmlformats.org/drawingml/2006/main" xmlns:r="http://schemas.openxmlformats.org/officeDocument/2006/relationships" xmlns:p="http://schemas.openxmlformats.org/presentationml/2006/main">
+  <p:cSld>
+    <p:bg>
+      <p:bgPr>
+        <a:solidFill>
+          <a:srgbClr val="FFFFFF"/>
+        </a:solidFill>
+        <a:effectLst/>
+      </p:bgPr>
+    </p:bg>
+    <p:spTree>
+      <p:nvGrpSpPr>
+        <p:cNvPr id="1" name=""/>
+        <p:cNvGrpSpPr/>
+        <p:nvPr/>
+      </p:nvGrpSpPr>
+      <p:grpSpPr>
+        <a:xfrm>
+          <a:off x="0" y="0"/>
+          <a:ext cx="0" cy="0"/>
+          <a:chOff x="0" y="0"/>
+          <a:chExt cx="0" cy="0"/>
+        </a:xfrm>
+      </p:grpSpPr>
+      <p:sp>
+        <p:nvSpPr>
+          <p:cNvPr id="2" name="Rectangle 1"/>
+          <p:cNvSpPr/>
+          <p:nvPr/>
+        </p:nvSpPr>
+        <p:spPr>
+          <a:xfrm>
+            <a:off x="0" y="0"/>
+            <a:ext cx="12191695" cy="164592"/>
+          </a:xfrm>
+          <a:prstGeom prst="rect">
+            <a:avLst/>
+          </a:prstGeom>
+          <a:solidFill>
+            <a:srgbClr val="24888E"/>
+          </a:solidFill>
+          <a:ln>
+            <a:noFill/>
+          </a:ln>
+        </p:spPr>
+        <p:style>
+          <a:lnRef idx="1">
+            <a:schemeClr val="accent1"/>
+          </a:lnRef>
+          <a:fillRef idx="3">
+            <a:schemeClr val="accent1"/>
+          </a:fillRef>
+          <a:effectRef idx="2">
+            <a:schemeClr val="accent1"/>
+          </a:effectRef>
+          <a:fontRef idx="minor">
+            <a:schemeClr val="lt1"/>
+          </a:fontRef>
+        </p:style>
+        <p:txBody>
+          <a:bodyPr rtlCol="0" anchor="ctr"/>
+          <a:lstStyle/>
+          <a:p>
+            <a:pPr algn="ctr"/>
+            <a:endParaRPr/>
+          </a:p>
+        </p:txBody>
+      </p:sp>
+      <p:sp>
+        <p:nvSpPr>
+          <p:cNvPr id="3" name="TextBox 2"/>
+          <p:cNvSpPr txBox="1"/>
+          <p:nvPr/>
+        </p:nvSpPr>
+        <p:spPr>
+          <a:xfrm>
+            <a:off x="502920" y="320040"/>
+            <a:ext cx="10972800" cy="502920"/>
+          </a:xfrm>
+          <a:prstGeom prst="rect">
+            <a:avLst/>
+          </a:prstGeom>
+          <a:noFill/>
+        </p:spPr>
+        <p:txBody>
+          <a:bodyPr wrap="square">
+            <a:spAutoFit/>
+          </a:bodyPr>
+          <a:lstStyle/>
+          <a:p>
+            <a:pPr algn="l"/>
+            <a:r>
+              <a:rPr sz="2900" b="1">
+                <a:solidFill>
+                  <a:srgbClr val="16253E"/>
+                </a:solidFill>
+                <a:latin typeface="Aptos"/>
+              </a:rPr>
+              <a:t>ML pipeline connection</a:t>
+            </a:r>
+          </a:p>
+        </p:txBody>
+      </p:sp>
+      <p:sp>
+        <p:nvSpPr>
+          <p:cNvPr id="4" name="TextBox 3"/>
+          <p:cNvSpPr txBox="1"/>
+          <p:nvPr/>
+        </p:nvSpPr>
+        <p:spPr>
+          <a:xfrm>
+            <a:off x="530352" y="877824"/>
+            <a:ext cx="7315200" cy="256032"/>
+          </a:xfrm>
+          <a:prstGeom prst="rect">
+            <a:avLst/>
+          </a:prstGeom>
+          <a:noFill/>
+        </p:spPr>
+        <p:txBody>
+          <a:bodyPr wrap="square">
+            <a:spAutoFit/>
+          </a:bodyPr>
+          <a:lstStyle/>
+          <a:p>
+            <a:pPr algn="l"/>
+            <a:r>
+              <a:rPr sz="1100" b="1">
+                <a:solidFill>
+                  <a:srgbClr val="24888E"/>
+                </a:solidFill>
+                <a:latin typeface="Aptos"/>
+              </a:rPr>
+              <a:t>ML BRIDGE</a:t>
+            </a:r>
+          </a:p>
+        </p:txBody>
+      </p:sp>
+      <p:sp>
+        <p:nvSpPr>
+          <p:cNvPr id="5" name="TextBox 4"/>
+          <p:cNvSpPr txBox="1"/>
+          <p:nvPr/>
+        </p:nvSpPr>
+        <p:spPr>
+          <a:xfrm>
+            <a:off x="10241280" y="877824"/>
+            <a:ext cx="1463040" cy="256032"/>
+          </a:xfrm>
+          <a:prstGeom prst="rect">
+            <a:avLst/>
+          </a:prstGeom>
+          <a:noFill/>
+        </p:spPr>
+        <p:txBody>
+          <a:bodyPr wrap="square">
+            <a:spAutoFit/>
+          </a:bodyPr>
+          <a:lstStyle/>
+          <a:p>
+            <a:pPr algn="r"/>
+            <a:r>
+              <a:rPr sz="1100" b="0">
+                <a:solidFill>
+                  <a:srgbClr val="5A6676"/>
+                </a:solidFill>
+                <a:latin typeface="Aptos"/>
+              </a:rPr>
+              <a:t>1:13–1:14</a:t>
+            </a:r>
+          </a:p>
+        </p:txBody>
+      </p:sp>
+      <p:sp>
+        <p:nvSpPr>
+          <p:cNvPr id="6" name="TextBox 5"/>
+          <p:cNvSpPr txBox="1"/>
+          <p:nvPr/>
+        </p:nvSpPr>
+        <p:spPr>
+          <a:xfrm>
+            <a:off x="530352" y="6519672"/>
+            <a:ext cx="3931920" cy="182880"/>
+          </a:xfrm>
+          <a:prstGeom prst="rect">
+            <a:avLst/>
+          </a:prstGeom>
+          <a:noFill/>
+        </p:spPr>
+        <p:txBody>
+          <a:bodyPr wrap="square">
+            <a:spAutoFit/>
+          </a:bodyPr>
+          <a:lstStyle/>
+          <a:p>
+            <a:pPr algn="l"/>
+            <a:r>
+              <a:rPr sz="900" b="1">
+                <a:solidFill>
+                  <a:srgbClr val="5A6676"/>
+                </a:solidFill>
+                <a:latin typeface="Aptos"/>
+              </a:rPr>
+              <a:t>WEEK 10 • TIME-FREQUENCY ANALYSIS</a:t>
+            </a:r>
+          </a:p>
+        </p:txBody>
+      </p:sp>
+      <p:sp>
+        <p:nvSpPr>
+          <p:cNvPr id="7" name="TextBox 6"/>
+          <p:cNvSpPr txBox="1"/>
+          <p:nvPr/>
+        </p:nvSpPr>
+        <p:spPr>
+          <a:xfrm>
+            <a:off x="777240" y="1417320"/>
+            <a:ext cx="10607040" cy="548640"/>
+          </a:xfrm>
+          <a:prstGeom prst="rect">
+            <a:avLst/>
+          </a:prstGeom>
+          <a:noFill/>
+        </p:spPr>
+        <p:txBody>
+          <a:bodyPr wrap="square">
+            <a:spAutoFit/>
+          </a:bodyPr>
+          <a:lstStyle/>
+          <a:p>
+            <a:pPr algn="l"/>
+            <a:r>
+              <a:rPr sz="2600" b="1">
+                <a:solidFill>
+                  <a:srgbClr val="16253E"/>
+                </a:solidFill>
+                <a:latin typeface="Aptos"/>
+              </a:rPr>
+              <a:t>stream → fast FIR / resampling → framing → features → model</a:t>
+            </a:r>
+          </a:p>
+        </p:txBody>
+      </p:sp>
+      <p:sp>
+        <p:nvSpPr>
+          <p:cNvPr id="8" name="TextBox 7"/>
+          <p:cNvSpPr txBox="1"/>
+          <p:nvPr/>
+        </p:nvSpPr>
+        <p:spPr>
+          <a:xfrm>
+            <a:off x="822960" y="2514600"/>
+            <a:ext cx="10241280" cy="2011680"/>
+          </a:xfrm>
+          <a:prstGeom prst="rect">
+            <a:avLst/>
+          </a:prstGeom>
+          <a:noFill/>
+        </p:spPr>
+        <p:txBody>
+          <a:bodyPr wrap="square">
+            <a:spAutoFit/>
+          </a:bodyPr>
+          <a:lstStyle/>
+          <a:p>
+            <a:pPr>
+              <a:spcAft>
+                <a:spcPts val="700"/>
+              </a:spcAft>
+              <a:defRPr sz="2000">
+                <a:solidFill>
+                  <a:srgbClr val="191E26"/>
+                </a:solidFill>
+                <a:latin typeface="Aptos"/>
+              </a:defRPr>
+            </a:pPr>
+            <a:r>
+              <a:t>• Fast convolution lets expensive preprocessing run continuously without changing the filter response.</a:t>
+            </a:r>
+          </a:p>
+          <a:p>
+            <a:pPr>
+              <a:spcAft>
+                <a:spcPts val="700"/>
+              </a:spcAft>
+              <a:defRPr sz="2000">
+                <a:solidFill>
+                  <a:srgbClr val="191E26"/>
+                </a:solidFill>
+                <a:latin typeface="Aptos"/>
+              </a:defRPr>
+            </a:pPr>
+            <a:r>
+              <a:t>• The same block boundaries should not create artifacts that leak into ML features.</a:t>
+            </a:r>
+          </a:p>
+          <a:p>
+            <a:pPr>
+              <a:spcAft>
+                <a:spcPts val="700"/>
+              </a:spcAft>
+              <a:defRPr sz="2000">
+                <a:solidFill>
+                  <a:srgbClr val="191E26"/>
+                </a:solidFill>
+                <a:latin typeface="Aptos"/>
+              </a:defRPr>
+            </a:pPr>
+            <a:r>
+              <a:t>• Streaming DSP and streaming inference must share latency and buffer budgets.</a:t>
+            </a:r>
+          </a:p>
+        </p:txBody>
+      </p:sp>
+      <p:sp>
+        <p:nvSpPr>
+          <p:cNvPr id="9" name="Rounded Rectangle 8"/>
+          <p:cNvSpPr/>
+          <p:nvPr/>
+        </p:nvSpPr>
+        <p:spPr>
+          <a:xfrm>
+            <a:off x="2011680" y="4800600"/>
+            <a:ext cx="8046720" cy="822960"/>
+          </a:xfrm>
+          <a:prstGeom prst="roundRect">
+            <a:avLst/>
+          </a:prstGeom>
+          <a:solidFill>
+            <a:srgbClr val="F1F5F9"/>
+          </a:solidFill>
+          <a:ln>
+            <a:solidFill>
+              <a:srgbClr val="24888E"/>
+            </a:solidFill>
+          </a:ln>
+        </p:spPr>
+        <p:style>
+          <a:lnRef idx="1">
+            <a:schemeClr val="accent1"/>
+          </a:lnRef>
+          <a:fillRef idx="3">
+            <a:schemeClr val="accent1"/>
+          </a:fillRef>
+          <a:effectRef idx="2">
+            <a:schemeClr val="accent1"/>
+          </a:effectRef>
+          <a:fontRef idx="minor">
+            <a:schemeClr val="lt1"/>
+          </a:fontRef>
+        </p:style>
+        <p:txBody>
+          <a:bodyPr rtlCol="0" anchor="ctr"/>
+          <a:lstStyle/>
+          <a:p>
+            <a:pPr algn="ctr"/>
+            <a:endParaRPr/>
+          </a:p>
+        </p:txBody>
+      </p:sp>
+      <p:sp>
+        <p:nvSpPr>
+          <p:cNvPr id="10" name="TextBox 9"/>
+          <p:cNvSpPr txBox="1"/>
+          <p:nvPr/>
+        </p:nvSpPr>
+        <p:spPr>
+          <a:xfrm>
+            <a:off x="2157984" y="4892040"/>
+            <a:ext cx="7754112" cy="219456"/>
+          </a:xfrm>
+          <a:prstGeom prst="rect">
+            <a:avLst/>
+          </a:prstGeom>
+          <a:noFill/>
+        </p:spPr>
+        <p:txBody>
+          <a:bodyPr wrap="square">
+            <a:spAutoFit/>
+          </a:bodyPr>
+          <a:lstStyle/>
+          <a:p>
+            <a:pPr algn="l"/>
+            <a:r>
+              <a:rPr sz="1100" b="1">
+                <a:solidFill>
+                  <a:srgbClr val="24888E"/>
+                </a:solidFill>
+                <a:latin typeface="Aptos"/>
+              </a:rPr>
+              <a:t>Think like a system designer</a:t>
+            </a:r>
+          </a:p>
+        </p:txBody>
+      </p:sp>
+      <p:sp>
+        <p:nvSpPr>
+          <p:cNvPr id="11" name="TextBox 10"/>
+          <p:cNvSpPr txBox="1"/>
+          <p:nvPr/>
+        </p:nvSpPr>
+        <p:spPr>
+          <a:xfrm>
+            <a:off x="2157984" y="5157216"/>
+            <a:ext cx="7754112" cy="374904"/>
+          </a:xfrm>
+          <a:prstGeom prst="rect">
+            <a:avLst/>
+          </a:prstGeom>
+          <a:noFill/>
+        </p:spPr>
+        <p:txBody>
+          <a:bodyPr wrap="square">
+            <a:spAutoFit/>
+          </a:bodyPr>
+          <a:lstStyle/>
+          <a:p>
+            <a:pPr algn="l"/>
+            <a:r>
+              <a:rPr sz="1700" b="0">
+                <a:solidFill>
+                  <a:srgbClr val="191E26"/>
+                </a:solidFill>
+                <a:latin typeface="Aptos"/>
+              </a:rPr>
+              <a:t>Accuracy, throughput, latency, and numerical equivalence all matter.</a:t>
+            </a:r>
+          </a:p>
+        </p:txBody>
+      </p:sp>
+    </p:spTree>
+  </p:cSld>
+  <p:clrMapOvr>
+    <a:masterClrMapping/>
+  </p:clrMapOvr>
+</p:sld>
+</file>
+
+<file path=ppt/slides/slide21.xml><?xml version="1.0" encoding="utf-8"?>
+<p:sld xmlns:a="http://schemas.openxmlformats.org/drawingml/2006/main" xmlns:r="http://schemas.openxmlformats.org/officeDocument/2006/relationships" xmlns:p="http://schemas.openxmlformats.org/presentationml/2006/main">
+  <p:cSld>
+    <p:bg>
+      <p:bgPr>
+        <a:solidFill>
+          <a:srgbClr val="FFFFFF"/>
+        </a:solidFill>
+        <a:effectLst/>
+      </p:bgPr>
+    </p:bg>
+    <p:spTree>
+      <p:nvGrpSpPr>
+        <p:cNvPr id="1" name=""/>
+        <p:cNvGrpSpPr/>
+        <p:nvPr/>
+      </p:nvGrpSpPr>
+      <p:grpSpPr>
+        <a:xfrm>
+          <a:off x="0" y="0"/>
+          <a:ext cx="0" cy="0"/>
+          <a:chOff x="0" y="0"/>
+          <a:chExt cx="0" cy="0"/>
+        </a:xfrm>
+      </p:grpSpPr>
+      <p:sp>
+        <p:nvSpPr>
+          <p:cNvPr id="2" name="Rectangle 1"/>
+          <p:cNvSpPr/>
+          <p:nvPr/>
+        </p:nvSpPr>
+        <p:spPr>
+          <a:xfrm>
+            <a:off x="0" y="0"/>
+            <a:ext cx="12191695" cy="164592"/>
+          </a:xfrm>
+          <a:prstGeom prst="rect">
+            <a:avLst/>
+          </a:prstGeom>
+          <a:solidFill>
+            <a:srgbClr val="24888E"/>
+          </a:solidFill>
+          <a:ln>
+            <a:noFill/>
+          </a:ln>
+        </p:spPr>
+        <p:style>
+          <a:lnRef idx="1">
+            <a:schemeClr val="accent1"/>
+          </a:lnRef>
+          <a:fillRef idx="3">
+            <a:schemeClr val="accent1"/>
+          </a:fillRef>
+          <a:effectRef idx="2">
+            <a:schemeClr val="accent1"/>
+          </a:effectRef>
+          <a:fontRef idx="minor">
+            <a:schemeClr val="lt1"/>
+          </a:fontRef>
+        </p:style>
+        <p:txBody>
+          <a:bodyPr rtlCol="0" anchor="ctr"/>
+          <a:lstStyle/>
+          <a:p>
+            <a:pPr algn="ctr"/>
+            <a:endParaRPr/>
+          </a:p>
+        </p:txBody>
+      </p:sp>
+      <p:sp>
+        <p:nvSpPr>
+          <p:cNvPr id="3" name="TextBox 2"/>
+          <p:cNvSpPr txBox="1"/>
+          <p:nvPr/>
+        </p:nvSpPr>
+        <p:spPr>
+          <a:xfrm>
+            <a:off x="502920" y="320040"/>
+            <a:ext cx="10972800" cy="538609"/>
+          </a:xfrm>
+          <a:prstGeom prst="rect">
+            <a:avLst/>
+          </a:prstGeom>
+          <a:noFill/>
+        </p:spPr>
+        <p:txBody>
+          <a:bodyPr wrap="square">
+            <a:spAutoFit/>
+          </a:bodyPr>
+          <a:lstStyle/>
+          <a:p>
+            <a:pPr algn="l"/>
+            <a:r>
+              <a:rPr sz="2900" b="1" dirty="0">
+                <a:solidFill>
+                  <a:srgbClr val="16253E"/>
+                </a:solidFill>
+                <a:latin typeface="Aptos"/>
+              </a:rPr>
+              <a:t>Lecture 1</a:t>
+            </a:r>
+            <a:r>
+              <a:rPr lang="en-US" sz="2900" b="1" dirty="0">
+                <a:solidFill>
+                  <a:srgbClr val="16253E"/>
+                </a:solidFill>
+                <a:latin typeface="Aptos"/>
+              </a:rPr>
+              <a:t>1</a:t>
+            </a:r>
+            <a:r>
+              <a:rPr sz="2900" b="1" dirty="0">
+                <a:solidFill>
+                  <a:srgbClr val="16253E"/>
+                </a:solidFill>
+                <a:latin typeface="Aptos"/>
+              </a:rPr>
+              <a:t> wrap-up</a:t>
+            </a:r>
+          </a:p>
+        </p:txBody>
+      </p:sp>
+      <p:sp>
+        <p:nvSpPr>
+          <p:cNvPr id="4" name="TextBox 3"/>
+          <p:cNvSpPr txBox="1"/>
+          <p:nvPr/>
+        </p:nvSpPr>
+        <p:spPr>
+          <a:xfrm>
+            <a:off x="530352" y="877824"/>
+            <a:ext cx="7315200" cy="256032"/>
+          </a:xfrm>
+          <a:prstGeom prst="rect">
+            <a:avLst/>
+          </a:prstGeom>
+          <a:noFill/>
+        </p:spPr>
+        <p:txBody>
+          <a:bodyPr wrap="square">
+            <a:spAutoFit/>
+          </a:bodyPr>
+          <a:lstStyle/>
+          <a:p>
+            <a:pPr algn="l"/>
+            <a:r>
+              <a:rPr sz="1100" b="1">
+                <a:solidFill>
+                  <a:srgbClr val="24888E"/>
+                </a:solidFill>
+                <a:latin typeface="Aptos"/>
+              </a:rPr>
+              <a:t>WRAP-UP</a:t>
+            </a:r>
+          </a:p>
+        </p:txBody>
+      </p:sp>
+      <p:sp>
+        <p:nvSpPr>
+          <p:cNvPr id="5" name="TextBox 4"/>
+          <p:cNvSpPr txBox="1"/>
+          <p:nvPr/>
+        </p:nvSpPr>
+        <p:spPr>
+          <a:xfrm>
+            <a:off x="10241280" y="877824"/>
+            <a:ext cx="1463040" cy="256032"/>
+          </a:xfrm>
+          <a:prstGeom prst="rect">
+            <a:avLst/>
+          </a:prstGeom>
+          <a:noFill/>
+        </p:spPr>
+        <p:txBody>
+          <a:bodyPr wrap="square">
+            <a:spAutoFit/>
+          </a:bodyPr>
+          <a:lstStyle/>
+          <a:p>
+            <a:pPr algn="r"/>
+            <a:r>
+              <a:rPr sz="1100" b="0">
+                <a:solidFill>
+                  <a:srgbClr val="5A6676"/>
+                </a:solidFill>
+                <a:latin typeface="Aptos"/>
+              </a:rPr>
+              <a:t>1:14–1:15</a:t>
+            </a:r>
+          </a:p>
+        </p:txBody>
+      </p:sp>
+      <p:sp>
+        <p:nvSpPr>
+          <p:cNvPr id="6" name="TextBox 5"/>
+          <p:cNvSpPr txBox="1"/>
+          <p:nvPr/>
+        </p:nvSpPr>
+        <p:spPr>
+          <a:xfrm>
+            <a:off x="530352" y="6519672"/>
+            <a:ext cx="3931920" cy="182880"/>
+          </a:xfrm>
+          <a:prstGeom prst="rect">
+            <a:avLst/>
+          </a:prstGeom>
+          <a:noFill/>
+        </p:spPr>
+        <p:txBody>
+          <a:bodyPr wrap="square">
+            <a:spAutoFit/>
+          </a:bodyPr>
+          <a:lstStyle/>
+          <a:p>
+            <a:pPr algn="l"/>
+            <a:r>
+              <a:rPr sz="900" b="1">
+                <a:solidFill>
+                  <a:srgbClr val="5A6676"/>
+                </a:solidFill>
+                <a:latin typeface="Aptos"/>
+              </a:rPr>
+              <a:t>WEEK 10 • TIME-FREQUENCY ANALYSIS</a:t>
+            </a:r>
+          </a:p>
+        </p:txBody>
+      </p:sp>
+      <p:sp>
+        <p:nvSpPr>
+          <p:cNvPr id="7" name="TextBox 6"/>
+          <p:cNvSpPr txBox="1"/>
+          <p:nvPr/>
+        </p:nvSpPr>
+        <p:spPr>
+          <a:xfrm>
+            <a:off x="731520" y="1280160"/>
+            <a:ext cx="7498079" cy="3200400"/>
+          </a:xfrm>
+          <a:prstGeom prst="rect">
+            <a:avLst/>
+          </a:prstGeom>
+          <a:noFill/>
+        </p:spPr>
+        <p:txBody>
+          <a:bodyPr wrap="square">
+            <a:spAutoFit/>
+          </a:bodyPr>
+          <a:lstStyle/>
+          <a:p>
+            <a:pPr>
+              <a:spcAft>
+                <a:spcPts val="700"/>
+              </a:spcAft>
+              <a:defRPr sz="2000">
+                <a:solidFill>
+                  <a:srgbClr val="191E26"/>
+                </a:solidFill>
+                <a:latin typeface="Aptos"/>
+              </a:defRPr>
+            </a:pPr>
+            <a:r>
+              <a:t>• The DFT samples the finite-record DTFT.</a:t>
+            </a:r>
+          </a:p>
+          <a:p>
+            <a:pPr>
+              <a:spcAft>
+                <a:spcPts val="700"/>
+              </a:spcAft>
+              <a:defRPr sz="2000">
+                <a:solidFill>
+                  <a:srgbClr val="191E26"/>
+                </a:solidFill>
+                <a:latin typeface="Aptos"/>
+              </a:defRPr>
+            </a:pPr>
+            <a:r>
+              <a:t>• DFT multiplication gives circular convolution.</a:t>
+            </a:r>
+          </a:p>
+          <a:p>
+            <a:pPr>
+              <a:spcAft>
+                <a:spcPts val="700"/>
+              </a:spcAft>
+              <a:defRPr sz="2000">
+                <a:solidFill>
+                  <a:srgbClr val="191E26"/>
+                </a:solidFill>
+                <a:latin typeface="Aptos"/>
+              </a:defRPr>
+            </a:pPr>
+            <a:r>
+              <a:t>• Zero-padding prevents wrap-around and recovers linear convolution.</a:t>
+            </a:r>
+          </a:p>
+          <a:p>
+            <a:pPr>
+              <a:spcAft>
+                <a:spcPts val="700"/>
+              </a:spcAft>
+              <a:defRPr sz="2000">
+                <a:solidFill>
+                  <a:srgbClr val="191E26"/>
+                </a:solidFill>
+                <a:latin typeface="Aptos"/>
+              </a:defRPr>
+            </a:pPr>
+            <a:r>
+              <a:t>• Overlap-add and overlap-save extend FFT convolution to endless streams.</a:t>
+            </a:r>
+          </a:p>
+          <a:p>
+            <a:pPr>
+              <a:spcAft>
+                <a:spcPts val="700"/>
+              </a:spcAft>
+              <a:defRPr sz="2000">
+                <a:solidFill>
+                  <a:srgbClr val="191E26"/>
+                </a:solidFill>
+                <a:latin typeface="Aptos"/>
+              </a:defRPr>
+            </a:pPr>
+            <a:r>
+              <a:t>• Block size is both a DSP and systems-design parameter.</a:t>
+            </a:r>
+          </a:p>
+        </p:txBody>
+      </p:sp>
+      <p:sp>
+        <p:nvSpPr>
+          <p:cNvPr id="8" name="Rounded Rectangle 7"/>
+          <p:cNvSpPr/>
+          <p:nvPr/>
+        </p:nvSpPr>
+        <p:spPr>
+          <a:xfrm>
+            <a:off x="8366760" y="1554480"/>
+            <a:ext cx="3017520" cy="2011680"/>
+          </a:xfrm>
+          <a:prstGeom prst="roundRect">
+            <a:avLst/>
+          </a:prstGeom>
+          <a:solidFill>
+            <a:srgbClr val="F1F5F9"/>
+          </a:solidFill>
+          <a:ln>
+            <a:solidFill>
+              <a:srgbClr val="D67D35"/>
+            </a:solidFill>
+          </a:ln>
+        </p:spPr>
+        <p:style>
+          <a:lnRef idx="1">
+            <a:schemeClr val="accent1"/>
+          </a:lnRef>
+          <a:fillRef idx="3">
+            <a:schemeClr val="accent1"/>
+          </a:fillRef>
+          <a:effectRef idx="2">
+            <a:schemeClr val="accent1"/>
+          </a:effectRef>
+          <a:fontRef idx="minor">
+            <a:schemeClr val="lt1"/>
+          </a:fontRef>
+        </p:style>
+        <p:txBody>
+          <a:bodyPr rtlCol="0" anchor="ctr"/>
+          <a:lstStyle/>
+          <a:p>
+            <a:pPr algn="ctr"/>
+            <a:endParaRPr/>
+          </a:p>
+        </p:txBody>
+      </p:sp>
+      <p:sp>
+        <p:nvSpPr>
+          <p:cNvPr id="9" name="TextBox 8"/>
+          <p:cNvSpPr txBox="1"/>
+          <p:nvPr/>
+        </p:nvSpPr>
+        <p:spPr>
+          <a:xfrm>
+            <a:off x="8513064" y="1645920"/>
+            <a:ext cx="2724912" cy="219456"/>
+          </a:xfrm>
+          <a:prstGeom prst="rect">
+            <a:avLst/>
+          </a:prstGeom>
+          <a:noFill/>
+        </p:spPr>
+        <p:txBody>
+          <a:bodyPr wrap="square">
+            <a:spAutoFit/>
+          </a:bodyPr>
+          <a:lstStyle/>
+          <a:p>
+            <a:pPr algn="l"/>
+            <a:r>
+              <a:rPr sz="1100" b="1">
+                <a:solidFill>
+                  <a:srgbClr val="D67D35"/>
+                </a:solidFill>
+                <a:latin typeface="Aptos"/>
+              </a:rPr>
+              <a:t>Exit ticket</a:t>
+            </a:r>
+          </a:p>
+        </p:txBody>
+      </p:sp>
+      <p:sp>
+        <p:nvSpPr>
+          <p:cNvPr id="10" name="TextBox 9"/>
+          <p:cNvSpPr txBox="1"/>
+          <p:nvPr/>
+        </p:nvSpPr>
+        <p:spPr>
+          <a:xfrm>
+            <a:off x="8513064" y="1911095"/>
+            <a:ext cx="2724912" cy="1563624"/>
+          </a:xfrm>
+          <a:prstGeom prst="rect">
+            <a:avLst/>
+          </a:prstGeom>
+          <a:noFill/>
+        </p:spPr>
+        <p:txBody>
+          <a:bodyPr wrap="square">
+            <a:spAutoFit/>
+          </a:bodyPr>
+          <a:lstStyle/>
+          <a:p>
+            <a:pPr algn="l"/>
+            <a:r>
+              <a:rPr sz="1700" b="0">
+                <a:solidFill>
+                  <a:srgbClr val="191E26"/>
+                </a:solidFill>
+                <a:latin typeface="Aptos"/>
+              </a:rPr>
+              <a:t>Why is NFFT ≥ B + Lh − 1 required in overlap-add, and what fails if NFFT is smaller?</a:t>
             </a:r>
           </a:p>
         </p:txBody>
